--- a/03_slide_presentasi/PERTEMUAN_03_Widget_Tree_dan_Layouting.pptx
+++ b/03_slide_presentasi/PERTEMUAN_03_Widget_Tree_dan_Layouting.pptx
@@ -3916,8 +3916,8 @@
         </p:nvSpPr>
         <p:spPr>
           <a:xfrm>
-            <a:off x="5669280" y="2176272"/>
-            <a:ext cx="5486400" cy="3977639"/>
+            <a:off x="5669280" y="2121408"/>
+            <a:ext cx="5486400" cy="3364992"/>
           </a:xfrm>
           <a:prstGeom prst="rect">
             <a:avLst/>
@@ -3931,7 +3931,7 @@
           <a:lstStyle/>
           <a:p>
             <a:pPr>
-              <a:defRPr sz="980">
+              <a:defRPr sz="919">
                 <a:solidFill>
                   <a:srgbClr val="F5F5F5"/>
                 </a:solidFill>
@@ -3993,6 +3993,142 @@
             <a:br/>
             <a:r>
               <a:t>);</a:t>
+            </a:r>
+          </a:p>
+        </p:txBody>
+      </p:sp>
+      <p:sp>
+        <p:nvSpPr>
+          <p:cNvPr id="15" name="Rectangle 14"/>
+          <p:cNvSpPr/>
+          <p:nvPr/>
+        </p:nvSpPr>
+        <p:spPr>
+          <a:xfrm>
+            <a:off x="5660136" y="5669280"/>
+            <a:ext cx="5608015" cy="548640"/>
+          </a:xfrm>
+          <a:prstGeom prst="rect">
+            <a:avLst/>
+          </a:prstGeom>
+          <a:solidFill>
+            <a:srgbClr val="000000"/>
+          </a:solidFill>
+          <a:ln>
+            <a:noFill/>
+          </a:ln>
+        </p:spPr>
+        <p:style>
+          <a:lnRef idx="1">
+            <a:schemeClr val="accent1"/>
+          </a:lnRef>
+          <a:fillRef idx="3">
+            <a:schemeClr val="accent1"/>
+          </a:fillRef>
+          <a:effectRef idx="2">
+            <a:schemeClr val="accent1"/>
+          </a:effectRef>
+          <a:fontRef idx="minor">
+            <a:schemeClr val="lt1"/>
+          </a:fontRef>
+        </p:style>
+        <p:txBody>
+          <a:bodyPr rtlCol="0" anchor="ctr"/>
+          <a:lstStyle/>
+          <a:p>
+            <a:pPr algn="ctr"/>
+          </a:p>
+        </p:txBody>
+      </p:sp>
+      <p:sp>
+        <p:nvSpPr>
+          <p:cNvPr id="16" name="Rectangle 15"/>
+          <p:cNvSpPr/>
+          <p:nvPr/>
+        </p:nvSpPr>
+        <p:spPr>
+          <a:xfrm>
+            <a:off x="5623560" y="5632704"/>
+            <a:ext cx="5608015" cy="548640"/>
+          </a:xfrm>
+          <a:prstGeom prst="rect">
+            <a:avLst/>
+          </a:prstGeom>
+          <a:solidFill>
+            <a:srgbClr val="FFE600"/>
+          </a:solidFill>
+          <a:ln w="25400">
+            <a:solidFill>
+              <a:srgbClr val="000000"/>
+            </a:solidFill>
+          </a:ln>
+        </p:spPr>
+        <p:style>
+          <a:lnRef idx="1">
+            <a:schemeClr val="accent1"/>
+          </a:lnRef>
+          <a:fillRef idx="3">
+            <a:schemeClr val="accent1"/>
+          </a:fillRef>
+          <a:effectRef idx="2">
+            <a:schemeClr val="accent1"/>
+          </a:effectRef>
+          <a:fontRef idx="minor">
+            <a:schemeClr val="lt1"/>
+          </a:fontRef>
+        </p:style>
+        <p:txBody>
+          <a:bodyPr rtlCol="0" anchor="ctr"/>
+          <a:lstStyle/>
+          <a:p>
+            <a:pPr algn="ctr"/>
+          </a:p>
+        </p:txBody>
+      </p:sp>
+      <p:sp>
+        <p:nvSpPr>
+          <p:cNvPr id="17" name="TextBox 16"/>
+          <p:cNvSpPr txBox="1"/>
+          <p:nvPr/>
+        </p:nvSpPr>
+        <p:spPr>
+          <a:xfrm>
+            <a:off x="5696712" y="5660136"/>
+            <a:ext cx="5461711" cy="493776"/>
+          </a:xfrm>
+          <a:prstGeom prst="rect">
+            <a:avLst/>
+          </a:prstGeom>
+          <a:noFill/>
+        </p:spPr>
+        <p:txBody>
+          <a:bodyPr wrap="square">
+            <a:spAutoFit/>
+          </a:bodyPr>
+          <a:lstStyle/>
+          <a:p>
+            <a:r>
+              <a:rPr sz="960" b="1">
+                <a:solidFill>
+                  <a:srgbClr val="000000"/>
+                </a:solidFill>
+                <a:latin typeface="Segoe UI"/>
+                <a:hlinkClick r:id="rId2"/>
+              </a:rPr>
+              <a:t>▶ BUKA KODE LENGKAP DI GITHUB (slide_10_single_child_layout.dart)</a:t>
+            </a:r>
+          </a:p>
+          <a:p>
+            <a:pPr>
+              <a:defRPr sz="760">
+                <a:solidFill>
+                  <a:srgbClr val="3C3C3C"/>
+                </a:solidFill>
+                <a:latin typeface="Segoe UI"/>
+              </a:defRPr>
+            </a:pPr>
+            <a:r>
+              <a:t>💡 Buka di browser / salin source code: github.com/antonprafanto/mobile2026</a:t>
             </a:r>
           </a:p>
         </p:txBody>
@@ -4583,8 +4719,8 @@
         </p:nvSpPr>
         <p:spPr>
           <a:xfrm>
-            <a:off x="5669280" y="2176272"/>
-            <a:ext cx="5486400" cy="3977639"/>
+            <a:off x="5669280" y="2121408"/>
+            <a:ext cx="5486400" cy="3364992"/>
           </a:xfrm>
           <a:prstGeom prst="rect">
             <a:avLst/>
@@ -4598,7 +4734,7 @@
           <a:lstStyle/>
           <a:p>
             <a:pPr>
-              <a:defRPr sz="980">
+              <a:defRPr sz="919">
                 <a:solidFill>
                   <a:srgbClr val="F5F5F5"/>
                 </a:solidFill>
@@ -4660,6 +4796,142 @@
             <a:br/>
             <a:r>
               <a:t>)</a:t>
+            </a:r>
+          </a:p>
+        </p:txBody>
+      </p:sp>
+      <p:sp>
+        <p:nvSpPr>
+          <p:cNvPr id="15" name="Rectangle 14"/>
+          <p:cNvSpPr/>
+          <p:nvPr/>
+        </p:nvSpPr>
+        <p:spPr>
+          <a:xfrm>
+            <a:off x="5660136" y="5669280"/>
+            <a:ext cx="5608015" cy="548640"/>
+          </a:xfrm>
+          <a:prstGeom prst="rect">
+            <a:avLst/>
+          </a:prstGeom>
+          <a:solidFill>
+            <a:srgbClr val="000000"/>
+          </a:solidFill>
+          <a:ln>
+            <a:noFill/>
+          </a:ln>
+        </p:spPr>
+        <p:style>
+          <a:lnRef idx="1">
+            <a:schemeClr val="accent1"/>
+          </a:lnRef>
+          <a:fillRef idx="3">
+            <a:schemeClr val="accent1"/>
+          </a:fillRef>
+          <a:effectRef idx="2">
+            <a:schemeClr val="accent1"/>
+          </a:effectRef>
+          <a:fontRef idx="minor">
+            <a:schemeClr val="lt1"/>
+          </a:fontRef>
+        </p:style>
+        <p:txBody>
+          <a:bodyPr rtlCol="0" anchor="ctr"/>
+          <a:lstStyle/>
+          <a:p>
+            <a:pPr algn="ctr"/>
+          </a:p>
+        </p:txBody>
+      </p:sp>
+      <p:sp>
+        <p:nvSpPr>
+          <p:cNvPr id="16" name="Rectangle 15"/>
+          <p:cNvSpPr/>
+          <p:nvPr/>
+        </p:nvSpPr>
+        <p:spPr>
+          <a:xfrm>
+            <a:off x="5623560" y="5632704"/>
+            <a:ext cx="5608015" cy="548640"/>
+          </a:xfrm>
+          <a:prstGeom prst="rect">
+            <a:avLst/>
+          </a:prstGeom>
+          <a:solidFill>
+            <a:srgbClr val="FFE600"/>
+          </a:solidFill>
+          <a:ln w="25400">
+            <a:solidFill>
+              <a:srgbClr val="000000"/>
+            </a:solidFill>
+          </a:ln>
+        </p:spPr>
+        <p:style>
+          <a:lnRef idx="1">
+            <a:schemeClr val="accent1"/>
+          </a:lnRef>
+          <a:fillRef idx="3">
+            <a:schemeClr val="accent1"/>
+          </a:fillRef>
+          <a:effectRef idx="2">
+            <a:schemeClr val="accent1"/>
+          </a:effectRef>
+          <a:fontRef idx="minor">
+            <a:schemeClr val="lt1"/>
+          </a:fontRef>
+        </p:style>
+        <p:txBody>
+          <a:bodyPr rtlCol="0" anchor="ctr"/>
+          <a:lstStyle/>
+          <a:p>
+            <a:pPr algn="ctr"/>
+          </a:p>
+        </p:txBody>
+      </p:sp>
+      <p:sp>
+        <p:nvSpPr>
+          <p:cNvPr id="17" name="TextBox 16"/>
+          <p:cNvSpPr txBox="1"/>
+          <p:nvPr/>
+        </p:nvSpPr>
+        <p:spPr>
+          <a:xfrm>
+            <a:off x="5696712" y="5660136"/>
+            <a:ext cx="5461711" cy="493776"/>
+          </a:xfrm>
+          <a:prstGeom prst="rect">
+            <a:avLst/>
+          </a:prstGeom>
+          <a:noFill/>
+        </p:spPr>
+        <p:txBody>
+          <a:bodyPr wrap="square">
+            <a:spAutoFit/>
+          </a:bodyPr>
+          <a:lstStyle/>
+          <a:p>
+            <a:r>
+              <a:rPr sz="960" b="1">
+                <a:solidFill>
+                  <a:srgbClr val="000000"/>
+                </a:solidFill>
+                <a:latin typeface="Segoe UI"/>
+                <a:hlinkClick r:id="rId2"/>
+              </a:rPr>
+              <a:t>▶ BUKA KODE LENGKAP DI GITHUB (slide_11_jebakan_color_vs_decoration.dart)</a:t>
+            </a:r>
+          </a:p>
+          <a:p>
+            <a:pPr>
+              <a:defRPr sz="760">
+                <a:solidFill>
+                  <a:srgbClr val="3C3C3C"/>
+                </a:solidFill>
+                <a:latin typeface="Segoe UI"/>
+              </a:defRPr>
+            </a:pPr>
+            <a:r>
+              <a:t>💡 Buka di browser / salin source code: github.com/antonprafanto/mobile2026</a:t>
             </a:r>
           </a:p>
         </p:txBody>
@@ -5266,8 +5538,8 @@
         </p:nvSpPr>
         <p:spPr>
           <a:xfrm>
-            <a:off x="5669280" y="2176272"/>
-            <a:ext cx="5486400" cy="3977639"/>
+            <a:off x="5669280" y="2121408"/>
+            <a:ext cx="5486400" cy="3364992"/>
           </a:xfrm>
           <a:prstGeom prst="rect">
             <a:avLst/>
@@ -5281,7 +5553,7 @@
           <a:lstStyle/>
           <a:p>
             <a:pPr>
-              <a:defRPr sz="980">
+              <a:defRPr sz="919">
                 <a:solidFill>
                   <a:srgbClr val="F5F5F5"/>
                 </a:solidFill>
@@ -5326,6 +5598,142 @@
             <a:br/>
             <a:r>
               <a:t>)</a:t>
+            </a:r>
+          </a:p>
+        </p:txBody>
+      </p:sp>
+      <p:sp>
+        <p:nvSpPr>
+          <p:cNvPr id="15" name="Rectangle 14"/>
+          <p:cNvSpPr/>
+          <p:nvPr/>
+        </p:nvSpPr>
+        <p:spPr>
+          <a:xfrm>
+            <a:off x="5660136" y="5669280"/>
+            <a:ext cx="5608015" cy="548640"/>
+          </a:xfrm>
+          <a:prstGeom prst="rect">
+            <a:avLst/>
+          </a:prstGeom>
+          <a:solidFill>
+            <a:srgbClr val="000000"/>
+          </a:solidFill>
+          <a:ln>
+            <a:noFill/>
+          </a:ln>
+        </p:spPr>
+        <p:style>
+          <a:lnRef idx="1">
+            <a:schemeClr val="accent1"/>
+          </a:lnRef>
+          <a:fillRef idx="3">
+            <a:schemeClr val="accent1"/>
+          </a:fillRef>
+          <a:effectRef idx="2">
+            <a:schemeClr val="accent1"/>
+          </a:effectRef>
+          <a:fontRef idx="minor">
+            <a:schemeClr val="lt1"/>
+          </a:fontRef>
+        </p:style>
+        <p:txBody>
+          <a:bodyPr rtlCol="0" anchor="ctr"/>
+          <a:lstStyle/>
+          <a:p>
+            <a:pPr algn="ctr"/>
+          </a:p>
+        </p:txBody>
+      </p:sp>
+      <p:sp>
+        <p:nvSpPr>
+          <p:cNvPr id="16" name="Rectangle 15"/>
+          <p:cNvSpPr/>
+          <p:nvPr/>
+        </p:nvSpPr>
+        <p:spPr>
+          <a:xfrm>
+            <a:off x="5623560" y="5632704"/>
+            <a:ext cx="5608015" cy="548640"/>
+          </a:xfrm>
+          <a:prstGeom prst="rect">
+            <a:avLst/>
+          </a:prstGeom>
+          <a:solidFill>
+            <a:srgbClr val="FFE600"/>
+          </a:solidFill>
+          <a:ln w="25400">
+            <a:solidFill>
+              <a:srgbClr val="000000"/>
+            </a:solidFill>
+          </a:ln>
+        </p:spPr>
+        <p:style>
+          <a:lnRef idx="1">
+            <a:schemeClr val="accent1"/>
+          </a:lnRef>
+          <a:fillRef idx="3">
+            <a:schemeClr val="accent1"/>
+          </a:fillRef>
+          <a:effectRef idx="2">
+            <a:schemeClr val="accent1"/>
+          </a:effectRef>
+          <a:fontRef idx="minor">
+            <a:schemeClr val="lt1"/>
+          </a:fontRef>
+        </p:style>
+        <p:txBody>
+          <a:bodyPr rtlCol="0" anchor="ctr"/>
+          <a:lstStyle/>
+          <a:p>
+            <a:pPr algn="ctr"/>
+          </a:p>
+        </p:txBody>
+      </p:sp>
+      <p:sp>
+        <p:nvSpPr>
+          <p:cNvPr id="17" name="TextBox 16"/>
+          <p:cNvSpPr txBox="1"/>
+          <p:nvPr/>
+        </p:nvSpPr>
+        <p:spPr>
+          <a:xfrm>
+            <a:off x="5696712" y="5660136"/>
+            <a:ext cx="5461711" cy="493776"/>
+          </a:xfrm>
+          <a:prstGeom prst="rect">
+            <a:avLst/>
+          </a:prstGeom>
+          <a:noFill/>
+        </p:spPr>
+        <p:txBody>
+          <a:bodyPr wrap="square">
+            <a:spAutoFit/>
+          </a:bodyPr>
+          <a:lstStyle/>
+          <a:p>
+            <a:r>
+              <a:rPr sz="960" b="1">
+                <a:solidFill>
+                  <a:srgbClr val="000000"/>
+                </a:solidFill>
+                <a:latin typeface="Segoe UI"/>
+                <a:hlinkClick r:id="rId2"/>
+              </a:rPr>
+              <a:t>▶ BUKA KODE LENGKAP DI GITHUB (slide_12_multi_child_row_column.dart)</a:t>
+            </a:r>
+          </a:p>
+          <a:p>
+            <a:pPr>
+              <a:defRPr sz="760">
+                <a:solidFill>
+                  <a:srgbClr val="3C3C3C"/>
+                </a:solidFill>
+                <a:latin typeface="Segoe UI"/>
+              </a:defRPr>
+            </a:pPr>
+            <a:r>
+              <a:t>💡 Buka di browser / salin source code: github.com/antonprafanto/mobile2026</a:t>
             </a:r>
           </a:p>
         </p:txBody>
@@ -5916,8 +6324,8 @@
         </p:nvSpPr>
         <p:spPr>
           <a:xfrm>
-            <a:off x="5669280" y="2176272"/>
-            <a:ext cx="5486400" cy="3977639"/>
+            <a:off x="5669280" y="2121408"/>
+            <a:ext cx="5486400" cy="3364992"/>
           </a:xfrm>
           <a:prstGeom prst="rect">
             <a:avLst/>
@@ -5931,7 +6339,7 @@
           <a:lstStyle/>
           <a:p>
             <a:pPr>
-              <a:defRPr sz="980">
+              <a:defRPr sz="919">
                 <a:solidFill>
                   <a:srgbClr val="F5F5F5"/>
                 </a:solidFill>
@@ -5972,6 +6380,142 @@
             <a:br/>
             <a:r>
               <a:t>)</a:t>
+            </a:r>
+          </a:p>
+        </p:txBody>
+      </p:sp>
+      <p:sp>
+        <p:nvSpPr>
+          <p:cNvPr id="15" name="Rectangle 14"/>
+          <p:cNvSpPr/>
+          <p:nvPr/>
+        </p:nvSpPr>
+        <p:spPr>
+          <a:xfrm>
+            <a:off x="5660136" y="5669280"/>
+            <a:ext cx="5608015" cy="548640"/>
+          </a:xfrm>
+          <a:prstGeom prst="rect">
+            <a:avLst/>
+          </a:prstGeom>
+          <a:solidFill>
+            <a:srgbClr val="000000"/>
+          </a:solidFill>
+          <a:ln>
+            <a:noFill/>
+          </a:ln>
+        </p:spPr>
+        <p:style>
+          <a:lnRef idx="1">
+            <a:schemeClr val="accent1"/>
+          </a:lnRef>
+          <a:fillRef idx="3">
+            <a:schemeClr val="accent1"/>
+          </a:fillRef>
+          <a:effectRef idx="2">
+            <a:schemeClr val="accent1"/>
+          </a:effectRef>
+          <a:fontRef idx="minor">
+            <a:schemeClr val="lt1"/>
+          </a:fontRef>
+        </p:style>
+        <p:txBody>
+          <a:bodyPr rtlCol="0" anchor="ctr"/>
+          <a:lstStyle/>
+          <a:p>
+            <a:pPr algn="ctr"/>
+          </a:p>
+        </p:txBody>
+      </p:sp>
+      <p:sp>
+        <p:nvSpPr>
+          <p:cNvPr id="16" name="Rectangle 15"/>
+          <p:cNvSpPr/>
+          <p:nvPr/>
+        </p:nvSpPr>
+        <p:spPr>
+          <a:xfrm>
+            <a:off x="5623560" y="5632704"/>
+            <a:ext cx="5608015" cy="548640"/>
+          </a:xfrm>
+          <a:prstGeom prst="rect">
+            <a:avLst/>
+          </a:prstGeom>
+          <a:solidFill>
+            <a:srgbClr val="FFE600"/>
+          </a:solidFill>
+          <a:ln w="25400">
+            <a:solidFill>
+              <a:srgbClr val="000000"/>
+            </a:solidFill>
+          </a:ln>
+        </p:spPr>
+        <p:style>
+          <a:lnRef idx="1">
+            <a:schemeClr val="accent1"/>
+          </a:lnRef>
+          <a:fillRef idx="3">
+            <a:schemeClr val="accent1"/>
+          </a:fillRef>
+          <a:effectRef idx="2">
+            <a:schemeClr val="accent1"/>
+          </a:effectRef>
+          <a:fontRef idx="minor">
+            <a:schemeClr val="lt1"/>
+          </a:fontRef>
+        </p:style>
+        <p:txBody>
+          <a:bodyPr rtlCol="0" anchor="ctr"/>
+          <a:lstStyle/>
+          <a:p>
+            <a:pPr algn="ctr"/>
+          </a:p>
+        </p:txBody>
+      </p:sp>
+      <p:sp>
+        <p:nvSpPr>
+          <p:cNvPr id="17" name="TextBox 16"/>
+          <p:cNvSpPr txBox="1"/>
+          <p:nvPr/>
+        </p:nvSpPr>
+        <p:spPr>
+          <a:xfrm>
+            <a:off x="5696712" y="5660136"/>
+            <a:ext cx="5461711" cy="493776"/>
+          </a:xfrm>
+          <a:prstGeom prst="rect">
+            <a:avLst/>
+          </a:prstGeom>
+          <a:noFill/>
+        </p:spPr>
+        <p:txBody>
+          <a:bodyPr wrap="square">
+            <a:spAutoFit/>
+          </a:bodyPr>
+          <a:lstStyle/>
+          <a:p>
+            <a:r>
+              <a:rPr sz="960" b="1">
+                <a:solidFill>
+                  <a:srgbClr val="000000"/>
+                </a:solidFill>
+                <a:latin typeface="Segoe UI"/>
+                <a:hlinkClick r:id="rId2"/>
+              </a:rPr>
+              <a:t>▶ BUKA KODE LENGKAP DI GITHUB (slide_13_trik_spasi_sizedbox_spacer.dart)</a:t>
+            </a:r>
+          </a:p>
+          <a:p>
+            <a:pPr>
+              <a:defRPr sz="760">
+                <a:solidFill>
+                  <a:srgbClr val="3C3C3C"/>
+                </a:solidFill>
+                <a:latin typeface="Segoe UI"/>
+              </a:defRPr>
+            </a:pPr>
+            <a:r>
+              <a:t>💡 Buka di browser / salin source code: github.com/antonprafanto/mobile2026</a:t>
             </a:r>
           </a:p>
         </p:txBody>
@@ -6578,8 +7122,8 @@
         </p:nvSpPr>
         <p:spPr>
           <a:xfrm>
-            <a:off x="5669280" y="2176272"/>
-            <a:ext cx="5486400" cy="3977639"/>
+            <a:off x="5669280" y="2121408"/>
+            <a:ext cx="5486400" cy="3364992"/>
           </a:xfrm>
           <a:prstGeom prst="rect">
             <a:avLst/>
@@ -6593,7 +7137,7 @@
           <a:lstStyle/>
           <a:p>
             <a:pPr>
-              <a:defRPr sz="980">
+              <a:defRPr sz="919">
                 <a:solidFill>
                   <a:srgbClr val="F5F5F5"/>
                 </a:solidFill>
@@ -6650,6 +7194,142 @@
             <a:br/>
             <a:r>
               <a:t>)</a:t>
+            </a:r>
+          </a:p>
+        </p:txBody>
+      </p:sp>
+      <p:sp>
+        <p:nvSpPr>
+          <p:cNvPr id="15" name="Rectangle 14"/>
+          <p:cNvSpPr/>
+          <p:nvPr/>
+        </p:nvSpPr>
+        <p:spPr>
+          <a:xfrm>
+            <a:off x="5660136" y="5669280"/>
+            <a:ext cx="5608015" cy="548640"/>
+          </a:xfrm>
+          <a:prstGeom prst="rect">
+            <a:avLst/>
+          </a:prstGeom>
+          <a:solidFill>
+            <a:srgbClr val="000000"/>
+          </a:solidFill>
+          <a:ln>
+            <a:noFill/>
+          </a:ln>
+        </p:spPr>
+        <p:style>
+          <a:lnRef idx="1">
+            <a:schemeClr val="accent1"/>
+          </a:lnRef>
+          <a:fillRef idx="3">
+            <a:schemeClr val="accent1"/>
+          </a:fillRef>
+          <a:effectRef idx="2">
+            <a:schemeClr val="accent1"/>
+          </a:effectRef>
+          <a:fontRef idx="minor">
+            <a:schemeClr val="lt1"/>
+          </a:fontRef>
+        </p:style>
+        <p:txBody>
+          <a:bodyPr rtlCol="0" anchor="ctr"/>
+          <a:lstStyle/>
+          <a:p>
+            <a:pPr algn="ctr"/>
+          </a:p>
+        </p:txBody>
+      </p:sp>
+      <p:sp>
+        <p:nvSpPr>
+          <p:cNvPr id="16" name="Rectangle 15"/>
+          <p:cNvSpPr/>
+          <p:nvPr/>
+        </p:nvSpPr>
+        <p:spPr>
+          <a:xfrm>
+            <a:off x="5623560" y="5632704"/>
+            <a:ext cx="5608015" cy="548640"/>
+          </a:xfrm>
+          <a:prstGeom prst="rect">
+            <a:avLst/>
+          </a:prstGeom>
+          <a:solidFill>
+            <a:srgbClr val="FFE600"/>
+          </a:solidFill>
+          <a:ln w="25400">
+            <a:solidFill>
+              <a:srgbClr val="000000"/>
+            </a:solidFill>
+          </a:ln>
+        </p:spPr>
+        <p:style>
+          <a:lnRef idx="1">
+            <a:schemeClr val="accent1"/>
+          </a:lnRef>
+          <a:fillRef idx="3">
+            <a:schemeClr val="accent1"/>
+          </a:fillRef>
+          <a:effectRef idx="2">
+            <a:schemeClr val="accent1"/>
+          </a:effectRef>
+          <a:fontRef idx="minor">
+            <a:schemeClr val="lt1"/>
+          </a:fontRef>
+        </p:style>
+        <p:txBody>
+          <a:bodyPr rtlCol="0" anchor="ctr"/>
+          <a:lstStyle/>
+          <a:p>
+            <a:pPr algn="ctr"/>
+          </a:p>
+        </p:txBody>
+      </p:sp>
+      <p:sp>
+        <p:nvSpPr>
+          <p:cNvPr id="17" name="TextBox 16"/>
+          <p:cNvSpPr txBox="1"/>
+          <p:nvPr/>
+        </p:nvSpPr>
+        <p:spPr>
+          <a:xfrm>
+            <a:off x="5696712" y="5660136"/>
+            <a:ext cx="5461711" cy="493776"/>
+          </a:xfrm>
+          <a:prstGeom prst="rect">
+            <a:avLst/>
+          </a:prstGeom>
+          <a:noFill/>
+        </p:spPr>
+        <p:txBody>
+          <a:bodyPr wrap="square">
+            <a:spAutoFit/>
+          </a:bodyPr>
+          <a:lstStyle/>
+          <a:p>
+            <a:r>
+              <a:rPr sz="960" b="1">
+                <a:solidFill>
+                  <a:srgbClr val="000000"/>
+                </a:solidFill>
+                <a:latin typeface="Segoe UI"/>
+                <a:hlinkClick r:id="rId2"/>
+              </a:rPr>
+              <a:t>▶ BUKA KODE LENGKAP DI GITHUB (slide_14_flexible_vs_expanded.dart)</a:t>
+            </a:r>
+          </a:p>
+          <a:p>
+            <a:pPr>
+              <a:defRPr sz="760">
+                <a:solidFill>
+                  <a:srgbClr val="3C3C3C"/>
+                </a:solidFill>
+                <a:latin typeface="Segoe UI"/>
+              </a:defRPr>
+            </a:pPr>
+            <a:r>
+              <a:t>💡 Buka di browser / salin source code: github.com/antonprafanto/mobile2026</a:t>
             </a:r>
           </a:p>
         </p:txBody>
@@ -7240,8 +7920,8 @@
         </p:nvSpPr>
         <p:spPr>
           <a:xfrm>
-            <a:off x="5669280" y="2176272"/>
-            <a:ext cx="5486400" cy="3977639"/>
+            <a:off x="5669280" y="2121408"/>
+            <a:ext cx="5486400" cy="3364992"/>
           </a:xfrm>
           <a:prstGeom prst="rect">
             <a:avLst/>
@@ -7255,7 +7935,7 @@
           <a:lstStyle/>
           <a:p>
             <a:pPr>
-              <a:defRPr sz="980">
+              <a:defRPr sz="919">
                 <a:solidFill>
                   <a:srgbClr val="F5F5F5"/>
                 </a:solidFill>
@@ -7324,6 +8004,142 @@
             <a:br/>
             <a:r>
               <a:t>)</a:t>
+            </a:r>
+          </a:p>
+        </p:txBody>
+      </p:sp>
+      <p:sp>
+        <p:nvSpPr>
+          <p:cNvPr id="15" name="Rectangle 14"/>
+          <p:cNvSpPr/>
+          <p:nvPr/>
+        </p:nvSpPr>
+        <p:spPr>
+          <a:xfrm>
+            <a:off x="5660136" y="5669280"/>
+            <a:ext cx="5608015" cy="548640"/>
+          </a:xfrm>
+          <a:prstGeom prst="rect">
+            <a:avLst/>
+          </a:prstGeom>
+          <a:solidFill>
+            <a:srgbClr val="000000"/>
+          </a:solidFill>
+          <a:ln>
+            <a:noFill/>
+          </a:ln>
+        </p:spPr>
+        <p:style>
+          <a:lnRef idx="1">
+            <a:schemeClr val="accent1"/>
+          </a:lnRef>
+          <a:fillRef idx="3">
+            <a:schemeClr val="accent1"/>
+          </a:fillRef>
+          <a:effectRef idx="2">
+            <a:schemeClr val="accent1"/>
+          </a:effectRef>
+          <a:fontRef idx="minor">
+            <a:schemeClr val="lt1"/>
+          </a:fontRef>
+        </p:style>
+        <p:txBody>
+          <a:bodyPr rtlCol="0" anchor="ctr"/>
+          <a:lstStyle/>
+          <a:p>
+            <a:pPr algn="ctr"/>
+          </a:p>
+        </p:txBody>
+      </p:sp>
+      <p:sp>
+        <p:nvSpPr>
+          <p:cNvPr id="16" name="Rectangle 15"/>
+          <p:cNvSpPr/>
+          <p:nvPr/>
+        </p:nvSpPr>
+        <p:spPr>
+          <a:xfrm>
+            <a:off x="5623560" y="5632704"/>
+            <a:ext cx="5608015" cy="548640"/>
+          </a:xfrm>
+          <a:prstGeom prst="rect">
+            <a:avLst/>
+          </a:prstGeom>
+          <a:solidFill>
+            <a:srgbClr val="FFE600"/>
+          </a:solidFill>
+          <a:ln w="25400">
+            <a:solidFill>
+              <a:srgbClr val="000000"/>
+            </a:solidFill>
+          </a:ln>
+        </p:spPr>
+        <p:style>
+          <a:lnRef idx="1">
+            <a:schemeClr val="accent1"/>
+          </a:lnRef>
+          <a:fillRef idx="3">
+            <a:schemeClr val="accent1"/>
+          </a:fillRef>
+          <a:effectRef idx="2">
+            <a:schemeClr val="accent1"/>
+          </a:effectRef>
+          <a:fontRef idx="minor">
+            <a:schemeClr val="lt1"/>
+          </a:fontRef>
+        </p:style>
+        <p:txBody>
+          <a:bodyPr rtlCol="0" anchor="ctr"/>
+          <a:lstStyle/>
+          <a:p>
+            <a:pPr algn="ctr"/>
+          </a:p>
+        </p:txBody>
+      </p:sp>
+      <p:sp>
+        <p:nvSpPr>
+          <p:cNvPr id="17" name="TextBox 16"/>
+          <p:cNvSpPr txBox="1"/>
+          <p:nvPr/>
+        </p:nvSpPr>
+        <p:spPr>
+          <a:xfrm>
+            <a:off x="5696712" y="5660136"/>
+            <a:ext cx="5461711" cy="493776"/>
+          </a:xfrm>
+          <a:prstGeom prst="rect">
+            <a:avLst/>
+          </a:prstGeom>
+          <a:noFill/>
+        </p:spPr>
+        <p:txBody>
+          <a:bodyPr wrap="square">
+            <a:spAutoFit/>
+          </a:bodyPr>
+          <a:lstStyle/>
+          <a:p>
+            <a:r>
+              <a:rPr sz="960" b="1">
+                <a:solidFill>
+                  <a:srgbClr val="000000"/>
+                </a:solidFill>
+                <a:latin typeface="Segoe UI"/>
+                <a:hlinkClick r:id="rId2"/>
+              </a:rPr>
+              <a:t>▶ BUKA KODE LENGKAP DI GITHUB (slide_15_layout_menumpuk_stack.dart)</a:t>
+            </a:r>
+          </a:p>
+          <a:p>
+            <a:pPr>
+              <a:defRPr sz="760">
+                <a:solidFill>
+                  <a:srgbClr val="3C3C3C"/>
+                </a:solidFill>
+                <a:latin typeface="Segoe UI"/>
+              </a:defRPr>
+            </a:pPr>
+            <a:r>
+              <a:t>💡 Buka di browser / salin source code: github.com/antonprafanto/mobile2026</a:t>
             </a:r>
           </a:p>
         </p:txBody>
@@ -7930,8 +8746,8 @@
         </p:nvSpPr>
         <p:spPr>
           <a:xfrm>
-            <a:off x="5669280" y="2176272"/>
-            <a:ext cx="5486400" cy="3977639"/>
+            <a:off x="5669280" y="2121408"/>
+            <a:ext cx="5486400" cy="3364992"/>
           </a:xfrm>
           <a:prstGeom prst="rect">
             <a:avLst/>
@@ -7945,7 +8761,7 @@
           <a:lstStyle/>
           <a:p>
             <a:pPr>
-              <a:defRPr sz="980">
+              <a:defRPr sz="919">
                 <a:solidFill>
                   <a:srgbClr val="F5F5F5"/>
                 </a:solidFill>
@@ -7994,6 +8810,142 @@
             <a:br/>
             <a:r>
               <a:t>)</a:t>
+            </a:r>
+          </a:p>
+        </p:txBody>
+      </p:sp>
+      <p:sp>
+        <p:nvSpPr>
+          <p:cNvPr id="15" name="Rectangle 14"/>
+          <p:cNvSpPr/>
+          <p:nvPr/>
+        </p:nvSpPr>
+        <p:spPr>
+          <a:xfrm>
+            <a:off x="5660136" y="5669280"/>
+            <a:ext cx="5608015" cy="548640"/>
+          </a:xfrm>
+          <a:prstGeom prst="rect">
+            <a:avLst/>
+          </a:prstGeom>
+          <a:solidFill>
+            <a:srgbClr val="000000"/>
+          </a:solidFill>
+          <a:ln>
+            <a:noFill/>
+          </a:ln>
+        </p:spPr>
+        <p:style>
+          <a:lnRef idx="1">
+            <a:schemeClr val="accent1"/>
+          </a:lnRef>
+          <a:fillRef idx="3">
+            <a:schemeClr val="accent1"/>
+          </a:fillRef>
+          <a:effectRef idx="2">
+            <a:schemeClr val="accent1"/>
+          </a:effectRef>
+          <a:fontRef idx="minor">
+            <a:schemeClr val="lt1"/>
+          </a:fontRef>
+        </p:style>
+        <p:txBody>
+          <a:bodyPr rtlCol="0" anchor="ctr"/>
+          <a:lstStyle/>
+          <a:p>
+            <a:pPr algn="ctr"/>
+          </a:p>
+        </p:txBody>
+      </p:sp>
+      <p:sp>
+        <p:nvSpPr>
+          <p:cNvPr id="16" name="Rectangle 15"/>
+          <p:cNvSpPr/>
+          <p:nvPr/>
+        </p:nvSpPr>
+        <p:spPr>
+          <a:xfrm>
+            <a:off x="5623560" y="5632704"/>
+            <a:ext cx="5608015" cy="548640"/>
+          </a:xfrm>
+          <a:prstGeom prst="rect">
+            <a:avLst/>
+          </a:prstGeom>
+          <a:solidFill>
+            <a:srgbClr val="FFE600"/>
+          </a:solidFill>
+          <a:ln w="25400">
+            <a:solidFill>
+              <a:srgbClr val="000000"/>
+            </a:solidFill>
+          </a:ln>
+        </p:spPr>
+        <p:style>
+          <a:lnRef idx="1">
+            <a:schemeClr val="accent1"/>
+          </a:lnRef>
+          <a:fillRef idx="3">
+            <a:schemeClr val="accent1"/>
+          </a:fillRef>
+          <a:effectRef idx="2">
+            <a:schemeClr val="accent1"/>
+          </a:effectRef>
+          <a:fontRef idx="minor">
+            <a:schemeClr val="lt1"/>
+          </a:fontRef>
+        </p:style>
+        <p:txBody>
+          <a:bodyPr rtlCol="0" anchor="ctr"/>
+          <a:lstStyle/>
+          <a:p>
+            <a:pPr algn="ctr"/>
+          </a:p>
+        </p:txBody>
+      </p:sp>
+      <p:sp>
+        <p:nvSpPr>
+          <p:cNvPr id="17" name="TextBox 16"/>
+          <p:cNvSpPr txBox="1"/>
+          <p:nvPr/>
+        </p:nvSpPr>
+        <p:spPr>
+          <a:xfrm>
+            <a:off x="5696712" y="5660136"/>
+            <a:ext cx="5461711" cy="493776"/>
+          </a:xfrm>
+          <a:prstGeom prst="rect">
+            <a:avLst/>
+          </a:prstGeom>
+          <a:noFill/>
+        </p:spPr>
+        <p:txBody>
+          <a:bodyPr wrap="square">
+            <a:spAutoFit/>
+          </a:bodyPr>
+          <a:lstStyle/>
+          <a:p>
+            <a:r>
+              <a:rPr sz="960" b="1">
+                <a:solidFill>
+                  <a:srgbClr val="000000"/>
+                </a:solidFill>
+                <a:latin typeface="Segoe UI"/>
+                <a:hlinkClick r:id="rId2"/>
+              </a:rPr>
+              <a:t>▶ BUKA KODE LENGKAP DI GITHUB (slide_16_penyelamat_kategori_wrap.dart)</a:t>
+            </a:r>
+          </a:p>
+          <a:p>
+            <a:pPr>
+              <a:defRPr sz="760">
+                <a:solidFill>
+                  <a:srgbClr val="3C3C3C"/>
+                </a:solidFill>
+                <a:latin typeface="Segoe UI"/>
+              </a:defRPr>
+            </a:pPr>
+            <a:r>
+              <a:t>💡 Buka di browser / salin source code: github.com/antonprafanto/mobile2026</a:t>
             </a:r>
           </a:p>
         </p:txBody>
@@ -8584,8 +9536,8 @@
         </p:nvSpPr>
         <p:spPr>
           <a:xfrm>
-            <a:off x="5669280" y="2176272"/>
-            <a:ext cx="5486400" cy="3977639"/>
+            <a:off x="5669280" y="2121408"/>
+            <a:ext cx="5486400" cy="3364992"/>
           </a:xfrm>
           <a:prstGeom prst="rect">
             <a:avLst/>
@@ -8599,7 +9551,7 @@
           <a:lstStyle/>
           <a:p>
             <a:pPr>
-              <a:defRPr sz="980">
+              <a:defRPr sz="919">
                 <a:solidFill>
                   <a:srgbClr val="F5F5F5"/>
                 </a:solidFill>
@@ -8689,6 +9641,142 @@
             <a:br/>
             <a:r>
               <a:t>}</a:t>
+            </a:r>
+          </a:p>
+        </p:txBody>
+      </p:sp>
+      <p:sp>
+        <p:nvSpPr>
+          <p:cNvPr id="15" name="Rectangle 14"/>
+          <p:cNvSpPr/>
+          <p:nvPr/>
+        </p:nvSpPr>
+        <p:spPr>
+          <a:xfrm>
+            <a:off x="5660136" y="5669280"/>
+            <a:ext cx="5608015" cy="548640"/>
+          </a:xfrm>
+          <a:prstGeom prst="rect">
+            <a:avLst/>
+          </a:prstGeom>
+          <a:solidFill>
+            <a:srgbClr val="000000"/>
+          </a:solidFill>
+          <a:ln>
+            <a:noFill/>
+          </a:ln>
+        </p:spPr>
+        <p:style>
+          <a:lnRef idx="1">
+            <a:schemeClr val="accent1"/>
+          </a:lnRef>
+          <a:fillRef idx="3">
+            <a:schemeClr val="accent1"/>
+          </a:fillRef>
+          <a:effectRef idx="2">
+            <a:schemeClr val="accent1"/>
+          </a:effectRef>
+          <a:fontRef idx="minor">
+            <a:schemeClr val="lt1"/>
+          </a:fontRef>
+        </p:style>
+        <p:txBody>
+          <a:bodyPr rtlCol="0" anchor="ctr"/>
+          <a:lstStyle/>
+          <a:p>
+            <a:pPr algn="ctr"/>
+          </a:p>
+        </p:txBody>
+      </p:sp>
+      <p:sp>
+        <p:nvSpPr>
+          <p:cNvPr id="16" name="Rectangle 15"/>
+          <p:cNvSpPr/>
+          <p:nvPr/>
+        </p:nvSpPr>
+        <p:spPr>
+          <a:xfrm>
+            <a:off x="5623560" y="5632704"/>
+            <a:ext cx="5608015" cy="548640"/>
+          </a:xfrm>
+          <a:prstGeom prst="rect">
+            <a:avLst/>
+          </a:prstGeom>
+          <a:solidFill>
+            <a:srgbClr val="FFE600"/>
+          </a:solidFill>
+          <a:ln w="25400">
+            <a:solidFill>
+              <a:srgbClr val="000000"/>
+            </a:solidFill>
+          </a:ln>
+        </p:spPr>
+        <p:style>
+          <a:lnRef idx="1">
+            <a:schemeClr val="accent1"/>
+          </a:lnRef>
+          <a:fillRef idx="3">
+            <a:schemeClr val="accent1"/>
+          </a:fillRef>
+          <a:effectRef idx="2">
+            <a:schemeClr val="accent1"/>
+          </a:effectRef>
+          <a:fontRef idx="minor">
+            <a:schemeClr val="lt1"/>
+          </a:fontRef>
+        </p:style>
+        <p:txBody>
+          <a:bodyPr rtlCol="0" anchor="ctr"/>
+          <a:lstStyle/>
+          <a:p>
+            <a:pPr algn="ctr"/>
+          </a:p>
+        </p:txBody>
+      </p:sp>
+      <p:sp>
+        <p:nvSpPr>
+          <p:cNvPr id="17" name="TextBox 16"/>
+          <p:cNvSpPr txBox="1"/>
+          <p:nvPr/>
+        </p:nvSpPr>
+        <p:spPr>
+          <a:xfrm>
+            <a:off x="5696712" y="5660136"/>
+            <a:ext cx="5461711" cy="493776"/>
+          </a:xfrm>
+          <a:prstGeom prst="rect">
+            <a:avLst/>
+          </a:prstGeom>
+          <a:noFill/>
+        </p:spPr>
+        <p:txBody>
+          <a:bodyPr wrap="square">
+            <a:spAutoFit/>
+          </a:bodyPr>
+          <a:lstStyle/>
+          <a:p>
+            <a:r>
+              <a:rPr sz="960" b="1">
+                <a:solidFill>
+                  <a:srgbClr val="000000"/>
+                </a:solidFill>
+                <a:latin typeface="Segoe UI"/>
+                <a:hlinkClick r:id="rId2"/>
+              </a:rPr>
+              <a:t>▶ BUKA KODE LENGKAP DI GITHUB (slide_17_scrollable_singlechildscrollview.dart)</a:t>
+            </a:r>
+          </a:p>
+          <a:p>
+            <a:pPr>
+              <a:defRPr sz="760">
+                <a:solidFill>
+                  <a:srgbClr val="3C3C3C"/>
+                </a:solidFill>
+                <a:latin typeface="Segoe UI"/>
+              </a:defRPr>
+            </a:pPr>
+            <a:r>
+              <a:t>💡 Buka di browser / salin source code: github.com/antonprafanto/mobile2026</a:t>
             </a:r>
           </a:p>
         </p:txBody>
@@ -9279,8 +10367,8 @@
         </p:nvSpPr>
         <p:spPr>
           <a:xfrm>
-            <a:off x="5669280" y="2176272"/>
-            <a:ext cx="5486400" cy="3977639"/>
+            <a:off x="5669280" y="2121408"/>
+            <a:ext cx="5486400" cy="3364992"/>
           </a:xfrm>
           <a:prstGeom prst="rect">
             <a:avLst/>
@@ -9294,7 +10382,7 @@
           <a:lstStyle/>
           <a:p>
             <a:pPr>
-              <a:defRPr sz="980">
+              <a:defRPr sz="919">
                 <a:solidFill>
                   <a:srgbClr val="F5F5F5"/>
                 </a:solidFill>
@@ -9347,6 +10435,142 @@
             <a:br/>
             <a:r>
               <a:t>)</a:t>
+            </a:r>
+          </a:p>
+        </p:txBody>
+      </p:sp>
+      <p:sp>
+        <p:nvSpPr>
+          <p:cNvPr id="15" name="Rectangle 14"/>
+          <p:cNvSpPr/>
+          <p:nvPr/>
+        </p:nvSpPr>
+        <p:spPr>
+          <a:xfrm>
+            <a:off x="5660136" y="5669280"/>
+            <a:ext cx="5608015" cy="548640"/>
+          </a:xfrm>
+          <a:prstGeom prst="rect">
+            <a:avLst/>
+          </a:prstGeom>
+          <a:solidFill>
+            <a:srgbClr val="000000"/>
+          </a:solidFill>
+          <a:ln>
+            <a:noFill/>
+          </a:ln>
+        </p:spPr>
+        <p:style>
+          <a:lnRef idx="1">
+            <a:schemeClr val="accent1"/>
+          </a:lnRef>
+          <a:fillRef idx="3">
+            <a:schemeClr val="accent1"/>
+          </a:fillRef>
+          <a:effectRef idx="2">
+            <a:schemeClr val="accent1"/>
+          </a:effectRef>
+          <a:fontRef idx="minor">
+            <a:schemeClr val="lt1"/>
+          </a:fontRef>
+        </p:style>
+        <p:txBody>
+          <a:bodyPr rtlCol="0" anchor="ctr"/>
+          <a:lstStyle/>
+          <a:p>
+            <a:pPr algn="ctr"/>
+          </a:p>
+        </p:txBody>
+      </p:sp>
+      <p:sp>
+        <p:nvSpPr>
+          <p:cNvPr id="16" name="Rectangle 15"/>
+          <p:cNvSpPr/>
+          <p:nvPr/>
+        </p:nvSpPr>
+        <p:spPr>
+          <a:xfrm>
+            <a:off x="5623560" y="5632704"/>
+            <a:ext cx="5608015" cy="548640"/>
+          </a:xfrm>
+          <a:prstGeom prst="rect">
+            <a:avLst/>
+          </a:prstGeom>
+          <a:solidFill>
+            <a:srgbClr val="FFE600"/>
+          </a:solidFill>
+          <a:ln w="25400">
+            <a:solidFill>
+              <a:srgbClr val="000000"/>
+            </a:solidFill>
+          </a:ln>
+        </p:spPr>
+        <p:style>
+          <a:lnRef idx="1">
+            <a:schemeClr val="accent1"/>
+          </a:lnRef>
+          <a:fillRef idx="3">
+            <a:schemeClr val="accent1"/>
+          </a:fillRef>
+          <a:effectRef idx="2">
+            <a:schemeClr val="accent1"/>
+          </a:effectRef>
+          <a:fontRef idx="minor">
+            <a:schemeClr val="lt1"/>
+          </a:fontRef>
+        </p:style>
+        <p:txBody>
+          <a:bodyPr rtlCol="0" anchor="ctr"/>
+          <a:lstStyle/>
+          <a:p>
+            <a:pPr algn="ctr"/>
+          </a:p>
+        </p:txBody>
+      </p:sp>
+      <p:sp>
+        <p:nvSpPr>
+          <p:cNvPr id="17" name="TextBox 16"/>
+          <p:cNvSpPr txBox="1"/>
+          <p:nvPr/>
+        </p:nvSpPr>
+        <p:spPr>
+          <a:xfrm>
+            <a:off x="5696712" y="5660136"/>
+            <a:ext cx="5461711" cy="493776"/>
+          </a:xfrm>
+          <a:prstGeom prst="rect">
+            <a:avLst/>
+          </a:prstGeom>
+          <a:noFill/>
+        </p:spPr>
+        <p:txBody>
+          <a:bodyPr wrap="square">
+            <a:spAutoFit/>
+          </a:bodyPr>
+          <a:lstStyle/>
+          <a:p>
+            <a:r>
+              <a:rPr sz="960" b="1">
+                <a:solidFill>
+                  <a:srgbClr val="000000"/>
+                </a:solidFill>
+                <a:latin typeface="Segoe UI"/>
+                <a:hlinkClick r:id="rId2"/>
+              </a:rPr>
+              <a:t>▶ BUKA KODE LENGKAP DI GITHUB (slide_18_scrollable_listview_builder.dart)</a:t>
+            </a:r>
+          </a:p>
+          <a:p>
+            <a:pPr>
+              <a:defRPr sz="760">
+                <a:solidFill>
+                  <a:srgbClr val="3C3C3C"/>
+                </a:solidFill>
+                <a:latin typeface="Segoe UI"/>
+              </a:defRPr>
+            </a:pPr>
+            <a:r>
+              <a:t>💡 Buka di browser / salin source code: github.com/antonprafanto/mobile2026</a:t>
             </a:r>
           </a:p>
         </p:txBody>
@@ -9969,8 +11193,8 @@
         </p:nvSpPr>
         <p:spPr>
           <a:xfrm>
-            <a:off x="5669280" y="2176272"/>
-            <a:ext cx="5486400" cy="3977639"/>
+            <a:off x="5669280" y="2121408"/>
+            <a:ext cx="5486400" cy="3364992"/>
           </a:xfrm>
           <a:prstGeom prst="rect">
             <a:avLst/>
@@ -9984,7 +11208,7 @@
           <a:lstStyle/>
           <a:p>
             <a:pPr>
-              <a:defRPr sz="980">
+              <a:defRPr sz="919">
                 <a:solidFill>
                   <a:srgbClr val="F5F5F5"/>
                 </a:solidFill>
@@ -10049,6 +11273,142 @@
             <a:br/>
             <a:r>
               <a:t>)</a:t>
+            </a:r>
+          </a:p>
+        </p:txBody>
+      </p:sp>
+      <p:sp>
+        <p:nvSpPr>
+          <p:cNvPr id="15" name="Rectangle 14"/>
+          <p:cNvSpPr/>
+          <p:nvPr/>
+        </p:nvSpPr>
+        <p:spPr>
+          <a:xfrm>
+            <a:off x="5660136" y="5669280"/>
+            <a:ext cx="5608015" cy="548640"/>
+          </a:xfrm>
+          <a:prstGeom prst="rect">
+            <a:avLst/>
+          </a:prstGeom>
+          <a:solidFill>
+            <a:srgbClr val="000000"/>
+          </a:solidFill>
+          <a:ln>
+            <a:noFill/>
+          </a:ln>
+        </p:spPr>
+        <p:style>
+          <a:lnRef idx="1">
+            <a:schemeClr val="accent1"/>
+          </a:lnRef>
+          <a:fillRef idx="3">
+            <a:schemeClr val="accent1"/>
+          </a:fillRef>
+          <a:effectRef idx="2">
+            <a:schemeClr val="accent1"/>
+          </a:effectRef>
+          <a:fontRef idx="minor">
+            <a:schemeClr val="lt1"/>
+          </a:fontRef>
+        </p:style>
+        <p:txBody>
+          <a:bodyPr rtlCol="0" anchor="ctr"/>
+          <a:lstStyle/>
+          <a:p>
+            <a:pPr algn="ctr"/>
+          </a:p>
+        </p:txBody>
+      </p:sp>
+      <p:sp>
+        <p:nvSpPr>
+          <p:cNvPr id="16" name="Rectangle 15"/>
+          <p:cNvSpPr/>
+          <p:nvPr/>
+        </p:nvSpPr>
+        <p:spPr>
+          <a:xfrm>
+            <a:off x="5623560" y="5632704"/>
+            <a:ext cx="5608015" cy="548640"/>
+          </a:xfrm>
+          <a:prstGeom prst="rect">
+            <a:avLst/>
+          </a:prstGeom>
+          <a:solidFill>
+            <a:srgbClr val="FFE600"/>
+          </a:solidFill>
+          <a:ln w="25400">
+            <a:solidFill>
+              <a:srgbClr val="000000"/>
+            </a:solidFill>
+          </a:ln>
+        </p:spPr>
+        <p:style>
+          <a:lnRef idx="1">
+            <a:schemeClr val="accent1"/>
+          </a:lnRef>
+          <a:fillRef idx="3">
+            <a:schemeClr val="accent1"/>
+          </a:fillRef>
+          <a:effectRef idx="2">
+            <a:schemeClr val="accent1"/>
+          </a:effectRef>
+          <a:fontRef idx="minor">
+            <a:schemeClr val="lt1"/>
+          </a:fontRef>
+        </p:style>
+        <p:txBody>
+          <a:bodyPr rtlCol="0" anchor="ctr"/>
+          <a:lstStyle/>
+          <a:p>
+            <a:pPr algn="ctr"/>
+          </a:p>
+        </p:txBody>
+      </p:sp>
+      <p:sp>
+        <p:nvSpPr>
+          <p:cNvPr id="17" name="TextBox 16"/>
+          <p:cNvSpPr txBox="1"/>
+          <p:nvPr/>
+        </p:nvSpPr>
+        <p:spPr>
+          <a:xfrm>
+            <a:off x="5696712" y="5660136"/>
+            <a:ext cx="5461711" cy="493776"/>
+          </a:xfrm>
+          <a:prstGeom prst="rect">
+            <a:avLst/>
+          </a:prstGeom>
+          <a:noFill/>
+        </p:spPr>
+        <p:txBody>
+          <a:bodyPr wrap="square">
+            <a:spAutoFit/>
+          </a:bodyPr>
+          <a:lstStyle/>
+          <a:p>
+            <a:r>
+              <a:rPr sz="960" b="1">
+                <a:solidFill>
+                  <a:srgbClr val="000000"/>
+                </a:solidFill>
+                <a:latin typeface="Segoe UI"/>
+                <a:hlinkClick r:id="rId2"/>
+              </a:rPr>
+              <a:t>▶ BUKA KODE LENGKAP DI GITHUB (slide_19_scrollable_gridview_builder.dart)</a:t>
+            </a:r>
+          </a:p>
+          <a:p>
+            <a:pPr>
+              <a:defRPr sz="760">
+                <a:solidFill>
+                  <a:srgbClr val="3C3C3C"/>
+                </a:solidFill>
+                <a:latin typeface="Segoe UI"/>
+              </a:defRPr>
+            </a:pPr>
+            <a:r>
+              <a:t>💡 Buka di browser / salin source code: github.com/antonprafanto/mobile2026</a:t>
             </a:r>
           </a:p>
         </p:txBody>
@@ -10639,8 +11999,8 @@
         </p:nvSpPr>
         <p:spPr>
           <a:xfrm>
-            <a:off x="5669280" y="2176272"/>
-            <a:ext cx="5486400" cy="3977639"/>
+            <a:off x="5669280" y="2121408"/>
+            <a:ext cx="5486400" cy="3364992"/>
           </a:xfrm>
           <a:prstGeom prst="rect">
             <a:avLst/>
@@ -10654,7 +12014,7 @@
           <a:lstStyle/>
           <a:p>
             <a:pPr>
-              <a:defRPr sz="980">
+              <a:defRPr sz="919">
                 <a:solidFill>
                   <a:srgbClr val="F5F5F5"/>
                 </a:solidFill>
@@ -10698,6 +12058,142 @@
             <a:br/>
             <a:r>
               <a:t># tekan huruf 'r' pada terminal untuk Hot Reload!</a:t>
+            </a:r>
+          </a:p>
+        </p:txBody>
+      </p:sp>
+      <p:sp>
+        <p:nvSpPr>
+          <p:cNvPr id="15" name="Rectangle 14"/>
+          <p:cNvSpPr/>
+          <p:nvPr/>
+        </p:nvSpPr>
+        <p:spPr>
+          <a:xfrm>
+            <a:off x="5660136" y="5669280"/>
+            <a:ext cx="5608015" cy="548640"/>
+          </a:xfrm>
+          <a:prstGeom prst="rect">
+            <a:avLst/>
+          </a:prstGeom>
+          <a:solidFill>
+            <a:srgbClr val="000000"/>
+          </a:solidFill>
+          <a:ln>
+            <a:noFill/>
+          </a:ln>
+        </p:spPr>
+        <p:style>
+          <a:lnRef idx="1">
+            <a:schemeClr val="accent1"/>
+          </a:lnRef>
+          <a:fillRef idx="3">
+            <a:schemeClr val="accent1"/>
+          </a:fillRef>
+          <a:effectRef idx="2">
+            <a:schemeClr val="accent1"/>
+          </a:effectRef>
+          <a:fontRef idx="minor">
+            <a:schemeClr val="lt1"/>
+          </a:fontRef>
+        </p:style>
+        <p:txBody>
+          <a:bodyPr rtlCol="0" anchor="ctr"/>
+          <a:lstStyle/>
+          <a:p>
+            <a:pPr algn="ctr"/>
+          </a:p>
+        </p:txBody>
+      </p:sp>
+      <p:sp>
+        <p:nvSpPr>
+          <p:cNvPr id="16" name="Rectangle 15"/>
+          <p:cNvSpPr/>
+          <p:nvPr/>
+        </p:nvSpPr>
+        <p:spPr>
+          <a:xfrm>
+            <a:off x="5623560" y="5632704"/>
+            <a:ext cx="5608015" cy="548640"/>
+          </a:xfrm>
+          <a:prstGeom prst="rect">
+            <a:avLst/>
+          </a:prstGeom>
+          <a:solidFill>
+            <a:srgbClr val="FFE600"/>
+          </a:solidFill>
+          <a:ln w="25400">
+            <a:solidFill>
+              <a:srgbClr val="000000"/>
+            </a:solidFill>
+          </a:ln>
+        </p:spPr>
+        <p:style>
+          <a:lnRef idx="1">
+            <a:schemeClr val="accent1"/>
+          </a:lnRef>
+          <a:fillRef idx="3">
+            <a:schemeClr val="accent1"/>
+          </a:fillRef>
+          <a:effectRef idx="2">
+            <a:schemeClr val="accent1"/>
+          </a:effectRef>
+          <a:fontRef idx="minor">
+            <a:schemeClr val="lt1"/>
+          </a:fontRef>
+        </p:style>
+        <p:txBody>
+          <a:bodyPr rtlCol="0" anchor="ctr"/>
+          <a:lstStyle/>
+          <a:p>
+            <a:pPr algn="ctr"/>
+          </a:p>
+        </p:txBody>
+      </p:sp>
+      <p:sp>
+        <p:nvSpPr>
+          <p:cNvPr id="17" name="TextBox 16"/>
+          <p:cNvSpPr txBox="1"/>
+          <p:nvPr/>
+        </p:nvSpPr>
+        <p:spPr>
+          <a:xfrm>
+            <a:off x="5696712" y="5660136"/>
+            <a:ext cx="5461711" cy="493776"/>
+          </a:xfrm>
+          <a:prstGeom prst="rect">
+            <a:avLst/>
+          </a:prstGeom>
+          <a:noFill/>
+        </p:spPr>
+        <p:txBody>
+          <a:bodyPr wrap="square">
+            <a:spAutoFit/>
+          </a:bodyPr>
+          <a:lstStyle/>
+          <a:p>
+            <a:r>
+              <a:rPr sz="960" b="1">
+                <a:solidFill>
+                  <a:srgbClr val="000000"/>
+                </a:solidFill>
+                <a:latin typeface="Segoe UI"/>
+                <a:hlinkClick r:id="rId2"/>
+              </a:rPr>
+              <a:t>▶ BUKA KODE LENGKAP DI GITHUB (slide_02_panduan_tools_dan_workflow.dart)</a:t>
+            </a:r>
+          </a:p>
+          <a:p>
+            <a:pPr>
+              <a:defRPr sz="760">
+                <a:solidFill>
+                  <a:srgbClr val="3C3C3C"/>
+                </a:solidFill>
+                <a:latin typeface="Segoe UI"/>
+              </a:defRPr>
+            </a:pPr>
+            <a:r>
+              <a:t>💡 Buka di browser / salin source code: github.com/antonprafanto/mobile2026</a:t>
             </a:r>
           </a:p>
         </p:txBody>
@@ -11288,8 +12784,8 @@
         </p:nvSpPr>
         <p:spPr>
           <a:xfrm>
-            <a:off x="5669280" y="2176272"/>
-            <a:ext cx="5486400" cy="3977639"/>
+            <a:off x="5669280" y="2121408"/>
+            <a:ext cx="5486400" cy="3364992"/>
           </a:xfrm>
           <a:prstGeom prst="rect">
             <a:avLst/>
@@ -11303,7 +12799,7 @@
           <a:lstStyle/>
           <a:p>
             <a:pPr>
-              <a:defRPr sz="980">
+              <a:defRPr sz="919">
                 <a:solidFill>
                   <a:srgbClr val="F5F5F5"/>
                 </a:solidFill>
@@ -11364,6 +12860,142 @@
             <a:br/>
             <a:r>
               <a:t>)</a:t>
+            </a:r>
+          </a:p>
+        </p:txBody>
+      </p:sp>
+      <p:sp>
+        <p:nvSpPr>
+          <p:cNvPr id="15" name="Rectangle 14"/>
+          <p:cNvSpPr/>
+          <p:nvPr/>
+        </p:nvSpPr>
+        <p:spPr>
+          <a:xfrm>
+            <a:off x="5660136" y="5669280"/>
+            <a:ext cx="5608015" cy="548640"/>
+          </a:xfrm>
+          <a:prstGeom prst="rect">
+            <a:avLst/>
+          </a:prstGeom>
+          <a:solidFill>
+            <a:srgbClr val="000000"/>
+          </a:solidFill>
+          <a:ln>
+            <a:noFill/>
+          </a:ln>
+        </p:spPr>
+        <p:style>
+          <a:lnRef idx="1">
+            <a:schemeClr val="accent1"/>
+          </a:lnRef>
+          <a:fillRef idx="3">
+            <a:schemeClr val="accent1"/>
+          </a:fillRef>
+          <a:effectRef idx="2">
+            <a:schemeClr val="accent1"/>
+          </a:effectRef>
+          <a:fontRef idx="minor">
+            <a:schemeClr val="lt1"/>
+          </a:fontRef>
+        </p:style>
+        <p:txBody>
+          <a:bodyPr rtlCol="0" anchor="ctr"/>
+          <a:lstStyle/>
+          <a:p>
+            <a:pPr algn="ctr"/>
+          </a:p>
+        </p:txBody>
+      </p:sp>
+      <p:sp>
+        <p:nvSpPr>
+          <p:cNvPr id="16" name="Rectangle 15"/>
+          <p:cNvSpPr/>
+          <p:nvPr/>
+        </p:nvSpPr>
+        <p:spPr>
+          <a:xfrm>
+            <a:off x="5623560" y="5632704"/>
+            <a:ext cx="5608015" cy="548640"/>
+          </a:xfrm>
+          <a:prstGeom prst="rect">
+            <a:avLst/>
+          </a:prstGeom>
+          <a:solidFill>
+            <a:srgbClr val="FFE600"/>
+          </a:solidFill>
+          <a:ln w="25400">
+            <a:solidFill>
+              <a:srgbClr val="000000"/>
+            </a:solidFill>
+          </a:ln>
+        </p:spPr>
+        <p:style>
+          <a:lnRef idx="1">
+            <a:schemeClr val="accent1"/>
+          </a:lnRef>
+          <a:fillRef idx="3">
+            <a:schemeClr val="accent1"/>
+          </a:fillRef>
+          <a:effectRef idx="2">
+            <a:schemeClr val="accent1"/>
+          </a:effectRef>
+          <a:fontRef idx="minor">
+            <a:schemeClr val="lt1"/>
+          </a:fontRef>
+        </p:style>
+        <p:txBody>
+          <a:bodyPr rtlCol="0" anchor="ctr"/>
+          <a:lstStyle/>
+          <a:p>
+            <a:pPr algn="ctr"/>
+          </a:p>
+        </p:txBody>
+      </p:sp>
+      <p:sp>
+        <p:nvSpPr>
+          <p:cNvPr id="17" name="TextBox 16"/>
+          <p:cNvSpPr txBox="1"/>
+          <p:nvPr/>
+        </p:nvSpPr>
+        <p:spPr>
+          <a:xfrm>
+            <a:off x="5696712" y="5660136"/>
+            <a:ext cx="5461711" cy="493776"/>
+          </a:xfrm>
+          <a:prstGeom prst="rect">
+            <a:avLst/>
+          </a:prstGeom>
+          <a:noFill/>
+        </p:spPr>
+        <p:txBody>
+          <a:bodyPr wrap="square">
+            <a:spAutoFit/>
+          </a:bodyPr>
+          <a:lstStyle/>
+          <a:p>
+            <a:r>
+              <a:rPr sz="960" b="1">
+                <a:solidFill>
+                  <a:srgbClr val="000000"/>
+                </a:solidFill>
+                <a:latin typeface="Segoe UI"/>
+                <a:hlinkClick r:id="rId2"/>
+              </a:rPr>
+              <a:t>▶ BUKA KODE LENGKAP DI GITHUB (slide_20_solusi_renderflex_overflow.dart)</a:t>
+            </a:r>
+          </a:p>
+          <a:p>
+            <a:pPr>
+              <a:defRPr sz="760">
+                <a:solidFill>
+                  <a:srgbClr val="3C3C3C"/>
+                </a:solidFill>
+                <a:latin typeface="Segoe UI"/>
+              </a:defRPr>
+            </a:pPr>
+            <a:r>
+              <a:t>💡 Buka di browser / salin source code: github.com/antonprafanto/mobile2026</a:t>
             </a:r>
           </a:p>
         </p:txBody>
@@ -11970,8 +13602,8 @@
         </p:nvSpPr>
         <p:spPr>
           <a:xfrm>
-            <a:off x="5669280" y="2176272"/>
-            <a:ext cx="5486400" cy="3977639"/>
+            <a:off x="5669280" y="2121408"/>
+            <a:ext cx="5486400" cy="3364992"/>
           </a:xfrm>
           <a:prstGeom prst="rect">
             <a:avLst/>
@@ -11985,7 +13617,7 @@
           <a:lstStyle/>
           <a:p>
             <a:pPr>
-              <a:defRPr sz="980">
+              <a:defRPr sz="919">
                 <a:solidFill>
                   <a:srgbClr val="F5F5F5"/>
                 </a:solidFill>
@@ -12046,6 +13678,142 @@
             <a:br/>
             <a:r>
               <a:t>)</a:t>
+            </a:r>
+          </a:p>
+        </p:txBody>
+      </p:sp>
+      <p:sp>
+        <p:nvSpPr>
+          <p:cNvPr id="15" name="Rectangle 14"/>
+          <p:cNvSpPr/>
+          <p:nvPr/>
+        </p:nvSpPr>
+        <p:spPr>
+          <a:xfrm>
+            <a:off x="5660136" y="5669280"/>
+            <a:ext cx="5608015" cy="548640"/>
+          </a:xfrm>
+          <a:prstGeom prst="rect">
+            <a:avLst/>
+          </a:prstGeom>
+          <a:solidFill>
+            <a:srgbClr val="000000"/>
+          </a:solidFill>
+          <a:ln>
+            <a:noFill/>
+          </a:ln>
+        </p:spPr>
+        <p:style>
+          <a:lnRef idx="1">
+            <a:schemeClr val="accent1"/>
+          </a:lnRef>
+          <a:fillRef idx="3">
+            <a:schemeClr val="accent1"/>
+          </a:fillRef>
+          <a:effectRef idx="2">
+            <a:schemeClr val="accent1"/>
+          </a:effectRef>
+          <a:fontRef idx="minor">
+            <a:schemeClr val="lt1"/>
+          </a:fontRef>
+        </p:style>
+        <p:txBody>
+          <a:bodyPr rtlCol="0" anchor="ctr"/>
+          <a:lstStyle/>
+          <a:p>
+            <a:pPr algn="ctr"/>
+          </a:p>
+        </p:txBody>
+      </p:sp>
+      <p:sp>
+        <p:nvSpPr>
+          <p:cNvPr id="16" name="Rectangle 15"/>
+          <p:cNvSpPr/>
+          <p:nvPr/>
+        </p:nvSpPr>
+        <p:spPr>
+          <a:xfrm>
+            <a:off x="5623560" y="5632704"/>
+            <a:ext cx="5608015" cy="548640"/>
+          </a:xfrm>
+          <a:prstGeom prst="rect">
+            <a:avLst/>
+          </a:prstGeom>
+          <a:solidFill>
+            <a:srgbClr val="FFE600"/>
+          </a:solidFill>
+          <a:ln w="25400">
+            <a:solidFill>
+              <a:srgbClr val="000000"/>
+            </a:solidFill>
+          </a:ln>
+        </p:spPr>
+        <p:style>
+          <a:lnRef idx="1">
+            <a:schemeClr val="accent1"/>
+          </a:lnRef>
+          <a:fillRef idx="3">
+            <a:schemeClr val="accent1"/>
+          </a:fillRef>
+          <a:effectRef idx="2">
+            <a:schemeClr val="accent1"/>
+          </a:effectRef>
+          <a:fontRef idx="minor">
+            <a:schemeClr val="lt1"/>
+          </a:fontRef>
+        </p:style>
+        <p:txBody>
+          <a:bodyPr rtlCol="0" anchor="ctr"/>
+          <a:lstStyle/>
+          <a:p>
+            <a:pPr algn="ctr"/>
+          </a:p>
+        </p:txBody>
+      </p:sp>
+      <p:sp>
+        <p:nvSpPr>
+          <p:cNvPr id="17" name="TextBox 16"/>
+          <p:cNvSpPr txBox="1"/>
+          <p:nvPr/>
+        </p:nvSpPr>
+        <p:spPr>
+          <a:xfrm>
+            <a:off x="5696712" y="5660136"/>
+            <a:ext cx="5461711" cy="493776"/>
+          </a:xfrm>
+          <a:prstGeom prst="rect">
+            <a:avLst/>
+          </a:prstGeom>
+          <a:noFill/>
+        </p:spPr>
+        <p:txBody>
+          <a:bodyPr wrap="square">
+            <a:spAutoFit/>
+          </a:bodyPr>
+          <a:lstStyle/>
+          <a:p>
+            <a:r>
+              <a:rPr sz="960" b="1">
+                <a:solidFill>
+                  <a:srgbClr val="000000"/>
+                </a:solidFill>
+                <a:latin typeface="Segoe UI"/>
+                <a:hlinkClick r:id="rId2"/>
+              </a:rPr>
+              <a:t>▶ BUKA KODE LENGKAP DI GITHUB (slide_21_solusi_unbounded_height.dart)</a:t>
+            </a:r>
+          </a:p>
+          <a:p>
+            <a:pPr>
+              <a:defRPr sz="760">
+                <a:solidFill>
+                  <a:srgbClr val="3C3C3C"/>
+                </a:solidFill>
+                <a:latin typeface="Segoe UI"/>
+              </a:defRPr>
+            </a:pPr>
+            <a:r>
+              <a:t>💡 Buka di browser / salin source code: github.com/antonprafanto/mobile2026</a:t>
             </a:r>
           </a:p>
         </p:txBody>
@@ -12652,8 +14420,8 @@
         </p:nvSpPr>
         <p:spPr>
           <a:xfrm>
-            <a:off x="5669280" y="2176272"/>
-            <a:ext cx="5486400" cy="3977639"/>
+            <a:off x="5669280" y="2121408"/>
+            <a:ext cx="5486400" cy="3364992"/>
           </a:xfrm>
           <a:prstGeom prst="rect">
             <a:avLst/>
@@ -12667,7 +14435,7 @@
           <a:lstStyle/>
           <a:p>
             <a:pPr>
-              <a:defRPr sz="980">
+              <a:defRPr sz="919">
                 <a:solidFill>
                   <a:srgbClr val="F5F5F5"/>
                 </a:solidFill>
@@ -12721,6 +14489,142 @@
             <a:br/>
             <a:r>
               <a:t>) // &lt;- Ada koma</a:t>
+            </a:r>
+          </a:p>
+        </p:txBody>
+      </p:sp>
+      <p:sp>
+        <p:nvSpPr>
+          <p:cNvPr id="15" name="Rectangle 14"/>
+          <p:cNvSpPr/>
+          <p:nvPr/>
+        </p:nvSpPr>
+        <p:spPr>
+          <a:xfrm>
+            <a:off x="5660136" y="5669280"/>
+            <a:ext cx="5608015" cy="548640"/>
+          </a:xfrm>
+          <a:prstGeom prst="rect">
+            <a:avLst/>
+          </a:prstGeom>
+          <a:solidFill>
+            <a:srgbClr val="000000"/>
+          </a:solidFill>
+          <a:ln>
+            <a:noFill/>
+          </a:ln>
+        </p:spPr>
+        <p:style>
+          <a:lnRef idx="1">
+            <a:schemeClr val="accent1"/>
+          </a:lnRef>
+          <a:fillRef idx="3">
+            <a:schemeClr val="accent1"/>
+          </a:fillRef>
+          <a:effectRef idx="2">
+            <a:schemeClr val="accent1"/>
+          </a:effectRef>
+          <a:fontRef idx="minor">
+            <a:schemeClr val="lt1"/>
+          </a:fontRef>
+        </p:style>
+        <p:txBody>
+          <a:bodyPr rtlCol="0" anchor="ctr"/>
+          <a:lstStyle/>
+          <a:p>
+            <a:pPr algn="ctr"/>
+          </a:p>
+        </p:txBody>
+      </p:sp>
+      <p:sp>
+        <p:nvSpPr>
+          <p:cNvPr id="16" name="Rectangle 15"/>
+          <p:cNvSpPr/>
+          <p:nvPr/>
+        </p:nvSpPr>
+        <p:spPr>
+          <a:xfrm>
+            <a:off x="5623560" y="5632704"/>
+            <a:ext cx="5608015" cy="548640"/>
+          </a:xfrm>
+          <a:prstGeom prst="rect">
+            <a:avLst/>
+          </a:prstGeom>
+          <a:solidFill>
+            <a:srgbClr val="FFE600"/>
+          </a:solidFill>
+          <a:ln w="25400">
+            <a:solidFill>
+              <a:srgbClr val="000000"/>
+            </a:solidFill>
+          </a:ln>
+        </p:spPr>
+        <p:style>
+          <a:lnRef idx="1">
+            <a:schemeClr val="accent1"/>
+          </a:lnRef>
+          <a:fillRef idx="3">
+            <a:schemeClr val="accent1"/>
+          </a:fillRef>
+          <a:effectRef idx="2">
+            <a:schemeClr val="accent1"/>
+          </a:effectRef>
+          <a:fontRef idx="minor">
+            <a:schemeClr val="lt1"/>
+          </a:fontRef>
+        </p:style>
+        <p:txBody>
+          <a:bodyPr rtlCol="0" anchor="ctr"/>
+          <a:lstStyle/>
+          <a:p>
+            <a:pPr algn="ctr"/>
+          </a:p>
+        </p:txBody>
+      </p:sp>
+      <p:sp>
+        <p:nvSpPr>
+          <p:cNvPr id="17" name="TextBox 16"/>
+          <p:cNvSpPr txBox="1"/>
+          <p:nvPr/>
+        </p:nvSpPr>
+        <p:spPr>
+          <a:xfrm>
+            <a:off x="5696712" y="5660136"/>
+            <a:ext cx="5461711" cy="493776"/>
+          </a:xfrm>
+          <a:prstGeom prst="rect">
+            <a:avLst/>
+          </a:prstGeom>
+          <a:noFill/>
+        </p:spPr>
+        <p:txBody>
+          <a:bodyPr wrap="square">
+            <a:spAutoFit/>
+          </a:bodyPr>
+          <a:lstStyle/>
+          <a:p>
+            <a:r>
+              <a:rPr sz="960" b="1">
+                <a:solidFill>
+                  <a:srgbClr val="000000"/>
+                </a:solidFill>
+                <a:latin typeface="Segoe UI"/>
+                <a:hlinkClick r:id="rId2"/>
+              </a:rPr>
+              <a:t>▶ BUKA KODE LENGKAP DI GITHUB (slide_22_trik_koma_ajaib_trailing.dart)</a:t>
+            </a:r>
+          </a:p>
+          <a:p>
+            <a:pPr>
+              <a:defRPr sz="760">
+                <a:solidFill>
+                  <a:srgbClr val="3C3C3C"/>
+                </a:solidFill>
+                <a:latin typeface="Segoe UI"/>
+              </a:defRPr>
+            </a:pPr>
+            <a:r>
+              <a:t>💡 Buka di browser / salin source code: github.com/antonprafanto/mobile2026</a:t>
             </a:r>
           </a:p>
         </p:txBody>
@@ -13327,8 +15231,8 @@
         </p:nvSpPr>
         <p:spPr>
           <a:xfrm>
-            <a:off x="5669280" y="2176272"/>
-            <a:ext cx="5486400" cy="3977639"/>
+            <a:off x="5669280" y="2121408"/>
+            <a:ext cx="5486400" cy="3364992"/>
           </a:xfrm>
           <a:prstGeom prst="rect">
             <a:avLst/>
@@ -13342,7 +15246,7 @@
           <a:lstStyle/>
           <a:p>
             <a:pPr>
-              <a:defRPr sz="980">
+              <a:defRPr sz="919">
                 <a:solidFill>
                   <a:srgbClr val="F5F5F5"/>
                 </a:solidFill>
@@ -13393,6 +15297,142 @@
             <a:br/>
             <a:r>
               <a:t>)</a:t>
+            </a:r>
+          </a:p>
+        </p:txBody>
+      </p:sp>
+      <p:sp>
+        <p:nvSpPr>
+          <p:cNvPr id="15" name="Rectangle 14"/>
+          <p:cNvSpPr/>
+          <p:nvPr/>
+        </p:nvSpPr>
+        <p:spPr>
+          <a:xfrm>
+            <a:off x="5660136" y="5669280"/>
+            <a:ext cx="5608015" cy="548640"/>
+          </a:xfrm>
+          <a:prstGeom prst="rect">
+            <a:avLst/>
+          </a:prstGeom>
+          <a:solidFill>
+            <a:srgbClr val="000000"/>
+          </a:solidFill>
+          <a:ln>
+            <a:noFill/>
+          </a:ln>
+        </p:spPr>
+        <p:style>
+          <a:lnRef idx="1">
+            <a:schemeClr val="accent1"/>
+          </a:lnRef>
+          <a:fillRef idx="3">
+            <a:schemeClr val="accent1"/>
+          </a:fillRef>
+          <a:effectRef idx="2">
+            <a:schemeClr val="accent1"/>
+          </a:effectRef>
+          <a:fontRef idx="minor">
+            <a:schemeClr val="lt1"/>
+          </a:fontRef>
+        </p:style>
+        <p:txBody>
+          <a:bodyPr rtlCol="0" anchor="ctr"/>
+          <a:lstStyle/>
+          <a:p>
+            <a:pPr algn="ctr"/>
+          </a:p>
+        </p:txBody>
+      </p:sp>
+      <p:sp>
+        <p:nvSpPr>
+          <p:cNvPr id="16" name="Rectangle 15"/>
+          <p:cNvSpPr/>
+          <p:nvPr/>
+        </p:nvSpPr>
+        <p:spPr>
+          <a:xfrm>
+            <a:off x="5623560" y="5632704"/>
+            <a:ext cx="5608015" cy="548640"/>
+          </a:xfrm>
+          <a:prstGeom prst="rect">
+            <a:avLst/>
+          </a:prstGeom>
+          <a:solidFill>
+            <a:srgbClr val="FFE600"/>
+          </a:solidFill>
+          <a:ln w="25400">
+            <a:solidFill>
+              <a:srgbClr val="000000"/>
+            </a:solidFill>
+          </a:ln>
+        </p:spPr>
+        <p:style>
+          <a:lnRef idx="1">
+            <a:schemeClr val="accent1"/>
+          </a:lnRef>
+          <a:fillRef idx="3">
+            <a:schemeClr val="accent1"/>
+          </a:fillRef>
+          <a:effectRef idx="2">
+            <a:schemeClr val="accent1"/>
+          </a:effectRef>
+          <a:fontRef idx="minor">
+            <a:schemeClr val="lt1"/>
+          </a:fontRef>
+        </p:style>
+        <p:txBody>
+          <a:bodyPr rtlCol="0" anchor="ctr"/>
+          <a:lstStyle/>
+          <a:p>
+            <a:pPr algn="ctr"/>
+          </a:p>
+        </p:txBody>
+      </p:sp>
+      <p:sp>
+        <p:nvSpPr>
+          <p:cNvPr id="17" name="TextBox 16"/>
+          <p:cNvSpPr txBox="1"/>
+          <p:nvPr/>
+        </p:nvSpPr>
+        <p:spPr>
+          <a:xfrm>
+            <a:off x="5696712" y="5660136"/>
+            <a:ext cx="5461711" cy="493776"/>
+          </a:xfrm>
+          <a:prstGeom prst="rect">
+            <a:avLst/>
+          </a:prstGeom>
+          <a:noFill/>
+        </p:spPr>
+        <p:txBody>
+          <a:bodyPr wrap="square">
+            <a:spAutoFit/>
+          </a:bodyPr>
+          <a:lstStyle/>
+          <a:p>
+            <a:r>
+              <a:rPr sz="960" b="1">
+                <a:solidFill>
+                  <a:srgbClr val="000000"/>
+                </a:solidFill>
+                <a:latin typeface="Segoe UI"/>
+                <a:hlinkClick r:id="rId2"/>
+              </a:rPr>
+              <a:t>▶ BUKA KODE LENGKAP DI GITHUB (slide_23_shortcut_refactor_inspector.dart)</a:t>
+            </a:r>
+          </a:p>
+          <a:p>
+            <a:pPr>
+              <a:defRPr sz="760">
+                <a:solidFill>
+                  <a:srgbClr val="3C3C3C"/>
+                </a:solidFill>
+                <a:latin typeface="Segoe UI"/>
+              </a:defRPr>
+            </a:pPr>
+            <a:r>
+              <a:t>💡 Buka di browser / salin source code: github.com/antonprafanto/mobile2026</a:t>
             </a:r>
           </a:p>
         </p:txBody>
@@ -13795,8 +15835,8 @@
         </p:nvSpPr>
         <p:spPr>
           <a:xfrm>
-            <a:off x="1188720" y="2240280"/>
-            <a:ext cx="9784080" cy="3931920"/>
+            <a:off x="1188720" y="2212848"/>
+            <a:ext cx="9784080" cy="3291840"/>
           </a:xfrm>
           <a:prstGeom prst="rect">
             <a:avLst/>
@@ -13811,9 +15851,9 @@
           <a:p>
             <a:pPr>
               <a:spcAft>
-                <a:spcPts val="500"/>
+                <a:spcPts val="400"/>
               </a:spcAft>
-              <a:defRPr sz="1450" b="1">
+              <a:defRPr sz="1350" b="1">
                 <a:solidFill>
                   <a:srgbClr val="000000"/>
                 </a:solidFill>
@@ -13827,9 +15867,9 @@
           <a:p>
             <a:pPr>
               <a:spcAft>
-                <a:spcPts val="300"/>
+                <a:spcPts val="200"/>
               </a:spcAft>
-              <a:defRPr sz="1100">
+              <a:defRPr sz="1050">
                 <a:solidFill>
                   <a:srgbClr val="1E1E1E"/>
                 </a:solidFill>
@@ -13843,9 +15883,9 @@
           <a:p>
             <a:pPr>
               <a:spcAft>
-                <a:spcPts val="300"/>
+                <a:spcPts val="200"/>
               </a:spcAft>
-              <a:defRPr sz="1100">
+              <a:defRPr sz="1050">
                 <a:solidFill>
                   <a:srgbClr val="1E1E1E"/>
                 </a:solidFill>
@@ -13859,9 +15899,9 @@
           <a:p>
             <a:pPr>
               <a:spcAft>
-                <a:spcPts val="300"/>
+                <a:spcPts val="200"/>
               </a:spcAft>
-              <a:defRPr sz="1100">
+              <a:defRPr sz="1050">
                 <a:solidFill>
                   <a:srgbClr val="1E1E1E"/>
                 </a:solidFill>
@@ -13875,9 +15915,9 @@
           <a:p>
             <a:pPr>
               <a:spcAft>
-                <a:spcPts val="300"/>
+                <a:spcPts val="200"/>
               </a:spcAft>
-              <a:defRPr sz="1100">
+              <a:defRPr sz="1050">
                 <a:solidFill>
                   <a:srgbClr val="1E1E1E"/>
                 </a:solidFill>
@@ -13891,9 +15931,9 @@
           <a:p>
             <a:pPr>
               <a:spcAft>
-                <a:spcPts val="300"/>
+                <a:spcPts val="200"/>
               </a:spcAft>
-              <a:defRPr sz="1100">
+              <a:defRPr sz="1050">
                 <a:solidFill>
                   <a:srgbClr val="1E1E1E"/>
                 </a:solidFill>
@@ -13907,9 +15947,9 @@
           <a:p>
             <a:pPr>
               <a:spcAft>
-                <a:spcPts val="300"/>
+                <a:spcPts val="200"/>
               </a:spcAft>
-              <a:defRPr sz="1100">
+              <a:defRPr sz="1050">
                 <a:solidFill>
                   <a:srgbClr val="1E1E1E"/>
                 </a:solidFill>
@@ -13923,9 +15963,9 @@
           <a:p>
             <a:pPr>
               <a:spcAft>
-                <a:spcPts val="300"/>
+                <a:spcPts val="200"/>
               </a:spcAft>
-              <a:defRPr sz="1100">
+              <a:defRPr sz="1050">
                 <a:solidFill>
                   <a:srgbClr val="1E1E1E"/>
                 </a:solidFill>
@@ -13939,9 +15979,9 @@
           <a:p>
             <a:pPr>
               <a:spcAft>
-                <a:spcPts val="300"/>
+                <a:spcPts val="200"/>
               </a:spcAft>
-              <a:defRPr sz="1100">
+              <a:defRPr sz="1050">
                 <a:solidFill>
                   <a:srgbClr val="1E1E1E"/>
                 </a:solidFill>
@@ -13953,9 +15993,8 @@
             </a:r>
           </a:p>
           <a:p>
-            <a:br/>
-            <a:pPr>
-              <a:defRPr sz="1150" b="1">
+            <a:pPr>
+              <a:defRPr sz="1100" b="1">
                 <a:solidFill>
                   <a:srgbClr val="00823C"/>
                 </a:solidFill>
@@ -13963,11 +16002,143 @@
               </a:defRPr>
             </a:pPr>
             <a:r>
-              <a:t>✔ Kriteria Keberhasilan (Tunjukkan ke Dosen/Asisten Lab):</a:t>
-            </a:r>
-            <a:br/>
-            <a:r>
-              <a:t>Tunjukkan kartu KTM Digital + Grid Menu di layar monitor/HP. Bebas 100% dari garis belang overflow dan rapi di bawah SafeArea!</a:t>
+              <a:t>✔ Kriteria Keberhasilan (Tunjukkan ke Dosen/Asisten Lab): Tunjukkan kartu KTM Digital + Grid Menu di layar monitor/HP. Bebas 100% dari garis belang overflow dan rapi di bawah SafeArea!</a:t>
+            </a:r>
+          </a:p>
+        </p:txBody>
+      </p:sp>
+      <p:sp>
+        <p:nvSpPr>
+          <p:cNvPr id="12" name="Rectangle 11"/>
+          <p:cNvSpPr/>
+          <p:nvPr/>
+        </p:nvSpPr>
+        <p:spPr>
+          <a:xfrm>
+            <a:off x="1225296" y="5669280"/>
+            <a:ext cx="9784080" cy="502920"/>
+          </a:xfrm>
+          <a:prstGeom prst="rect">
+            <a:avLst/>
+          </a:prstGeom>
+          <a:solidFill>
+            <a:srgbClr val="000000"/>
+          </a:solidFill>
+          <a:ln>
+            <a:noFill/>
+          </a:ln>
+        </p:spPr>
+        <p:style>
+          <a:lnRef idx="1">
+            <a:schemeClr val="accent1"/>
+          </a:lnRef>
+          <a:fillRef idx="3">
+            <a:schemeClr val="accent1"/>
+          </a:fillRef>
+          <a:effectRef idx="2">
+            <a:schemeClr val="accent1"/>
+          </a:effectRef>
+          <a:fontRef idx="minor">
+            <a:schemeClr val="lt1"/>
+          </a:fontRef>
+        </p:style>
+        <p:txBody>
+          <a:bodyPr rtlCol="0" anchor="ctr"/>
+          <a:lstStyle/>
+          <a:p>
+            <a:pPr algn="ctr"/>
+          </a:p>
+        </p:txBody>
+      </p:sp>
+      <p:sp>
+        <p:nvSpPr>
+          <p:cNvPr id="13" name="Rectangle 12"/>
+          <p:cNvSpPr/>
+          <p:nvPr/>
+        </p:nvSpPr>
+        <p:spPr>
+          <a:xfrm>
+            <a:off x="1188720" y="5632704"/>
+            <a:ext cx="9784080" cy="502920"/>
+          </a:xfrm>
+          <a:prstGeom prst="rect">
+            <a:avLst/>
+          </a:prstGeom>
+          <a:solidFill>
+            <a:srgbClr val="4ADE80"/>
+          </a:solidFill>
+          <a:ln w="25400">
+            <a:solidFill>
+              <a:srgbClr val="000000"/>
+            </a:solidFill>
+          </a:ln>
+        </p:spPr>
+        <p:style>
+          <a:lnRef idx="1">
+            <a:schemeClr val="accent1"/>
+          </a:lnRef>
+          <a:fillRef idx="3">
+            <a:schemeClr val="accent1"/>
+          </a:fillRef>
+          <a:effectRef idx="2">
+            <a:schemeClr val="accent1"/>
+          </a:effectRef>
+          <a:fontRef idx="minor">
+            <a:schemeClr val="lt1"/>
+          </a:fontRef>
+        </p:style>
+        <p:txBody>
+          <a:bodyPr rtlCol="0" anchor="ctr"/>
+          <a:lstStyle/>
+          <a:p>
+            <a:pPr algn="ctr"/>
+          </a:p>
+        </p:txBody>
+      </p:sp>
+      <p:sp>
+        <p:nvSpPr>
+          <p:cNvPr id="14" name="TextBox 13"/>
+          <p:cNvSpPr txBox="1"/>
+          <p:nvPr/>
+        </p:nvSpPr>
+        <p:spPr>
+          <a:xfrm>
+            <a:off x="1261872" y="5660136"/>
+            <a:ext cx="9637776" cy="448056"/>
+          </a:xfrm>
+          <a:prstGeom prst="rect">
+            <a:avLst/>
+          </a:prstGeom>
+          <a:noFill/>
+        </p:spPr>
+        <p:txBody>
+          <a:bodyPr wrap="square">
+            <a:spAutoFit/>
+          </a:bodyPr>
+          <a:lstStyle/>
+          <a:p>
+            <a:r>
+              <a:rPr sz="1000" b="1">
+                <a:solidFill>
+                  <a:srgbClr val="000000"/>
+                </a:solidFill>
+                <a:latin typeface="Segoe UI"/>
+                <a:hlinkClick r:id="rId2"/>
+              </a:rPr>
+              <a:t>▶ BUKA KODE SOLUSI LENGKAP LAB QUEST DI GITHUB (slide_24_lab_quest_dashboard_profil.dart)</a:t>
+            </a:r>
+          </a:p>
+          <a:p>
+            <a:pPr>
+              <a:defRPr sz="800">
+                <a:solidFill>
+                  <a:srgbClr val="3C3C3C"/>
+                </a:solidFill>
+                <a:latin typeface="Segoe UI"/>
+              </a:defRPr>
+            </a:pPr>
+            <a:r>
+              <a:t>💡 Buka di browser / salin source code: github.com/antonprafanto/mobile2026</a:t>
             </a:r>
           </a:p>
         </p:txBody>
@@ -14574,8 +16745,8 @@
         </p:nvSpPr>
         <p:spPr>
           <a:xfrm>
-            <a:off x="5669280" y="2176272"/>
-            <a:ext cx="5486400" cy="3977639"/>
+            <a:off x="5669280" y="2121408"/>
+            <a:ext cx="5486400" cy="3364992"/>
           </a:xfrm>
           <a:prstGeom prst="rect">
             <a:avLst/>
@@ -14589,7 +16760,7 @@
           <a:lstStyle/>
           <a:p>
             <a:pPr>
-              <a:defRPr sz="980">
+              <a:defRPr sz="919">
                 <a:solidFill>
                   <a:srgbClr val="F5F5F5"/>
                 </a:solidFill>
@@ -14642,6 +16813,142 @@
             <a:br/>
             <a:r>
               <a:t>}</a:t>
+            </a:r>
+          </a:p>
+        </p:txBody>
+      </p:sp>
+      <p:sp>
+        <p:nvSpPr>
+          <p:cNvPr id="15" name="Rectangle 14"/>
+          <p:cNvSpPr/>
+          <p:nvPr/>
+        </p:nvSpPr>
+        <p:spPr>
+          <a:xfrm>
+            <a:off x="5660136" y="5669280"/>
+            <a:ext cx="5608015" cy="548640"/>
+          </a:xfrm>
+          <a:prstGeom prst="rect">
+            <a:avLst/>
+          </a:prstGeom>
+          <a:solidFill>
+            <a:srgbClr val="000000"/>
+          </a:solidFill>
+          <a:ln>
+            <a:noFill/>
+          </a:ln>
+        </p:spPr>
+        <p:style>
+          <a:lnRef idx="1">
+            <a:schemeClr val="accent1"/>
+          </a:lnRef>
+          <a:fillRef idx="3">
+            <a:schemeClr val="accent1"/>
+          </a:fillRef>
+          <a:effectRef idx="2">
+            <a:schemeClr val="accent1"/>
+          </a:effectRef>
+          <a:fontRef idx="minor">
+            <a:schemeClr val="lt1"/>
+          </a:fontRef>
+        </p:style>
+        <p:txBody>
+          <a:bodyPr rtlCol="0" anchor="ctr"/>
+          <a:lstStyle/>
+          <a:p>
+            <a:pPr algn="ctr"/>
+          </a:p>
+        </p:txBody>
+      </p:sp>
+      <p:sp>
+        <p:nvSpPr>
+          <p:cNvPr id="16" name="Rectangle 15"/>
+          <p:cNvSpPr/>
+          <p:nvPr/>
+        </p:nvSpPr>
+        <p:spPr>
+          <a:xfrm>
+            <a:off x="5623560" y="5632704"/>
+            <a:ext cx="5608015" cy="548640"/>
+          </a:xfrm>
+          <a:prstGeom prst="rect">
+            <a:avLst/>
+          </a:prstGeom>
+          <a:solidFill>
+            <a:srgbClr val="FFE600"/>
+          </a:solidFill>
+          <a:ln w="25400">
+            <a:solidFill>
+              <a:srgbClr val="000000"/>
+            </a:solidFill>
+          </a:ln>
+        </p:spPr>
+        <p:style>
+          <a:lnRef idx="1">
+            <a:schemeClr val="accent1"/>
+          </a:lnRef>
+          <a:fillRef idx="3">
+            <a:schemeClr val="accent1"/>
+          </a:fillRef>
+          <a:effectRef idx="2">
+            <a:schemeClr val="accent1"/>
+          </a:effectRef>
+          <a:fontRef idx="minor">
+            <a:schemeClr val="lt1"/>
+          </a:fontRef>
+        </p:style>
+        <p:txBody>
+          <a:bodyPr rtlCol="0" anchor="ctr"/>
+          <a:lstStyle/>
+          <a:p>
+            <a:pPr algn="ctr"/>
+          </a:p>
+        </p:txBody>
+      </p:sp>
+      <p:sp>
+        <p:nvSpPr>
+          <p:cNvPr id="17" name="TextBox 16"/>
+          <p:cNvSpPr txBox="1"/>
+          <p:nvPr/>
+        </p:nvSpPr>
+        <p:spPr>
+          <a:xfrm>
+            <a:off x="5696712" y="5660136"/>
+            <a:ext cx="5461711" cy="493776"/>
+          </a:xfrm>
+          <a:prstGeom prst="rect">
+            <a:avLst/>
+          </a:prstGeom>
+          <a:noFill/>
+        </p:spPr>
+        <p:txBody>
+          <a:bodyPr wrap="square">
+            <a:spAutoFit/>
+          </a:bodyPr>
+          <a:lstStyle/>
+          <a:p>
+            <a:r>
+              <a:rPr sz="960" b="1">
+                <a:solidFill>
+                  <a:srgbClr val="000000"/>
+                </a:solidFill>
+                <a:latin typeface="Segoe UI"/>
+                <a:hlinkClick r:id="rId2"/>
+              </a:rPr>
+              <a:t>▶ BUKA KODE LENGKAP DI GITHUB (slide_03_filosofi_everything_is_widget.dart)</a:t>
+            </a:r>
+          </a:p>
+          <a:p>
+            <a:pPr>
+              <a:defRPr sz="760">
+                <a:solidFill>
+                  <a:srgbClr val="3C3C3C"/>
+                </a:solidFill>
+                <a:latin typeface="Segoe UI"/>
+              </a:defRPr>
+            </a:pPr>
+            <a:r>
+              <a:t>💡 Buka di browser / salin source code: github.com/antonprafanto/mobile2026</a:t>
             </a:r>
           </a:p>
         </p:txBody>
@@ -15232,8 +17539,8 @@
         </p:nvSpPr>
         <p:spPr>
           <a:xfrm>
-            <a:off x="5669280" y="2176272"/>
-            <a:ext cx="5486400" cy="3977639"/>
+            <a:off x="5669280" y="2121408"/>
+            <a:ext cx="5486400" cy="3364992"/>
           </a:xfrm>
           <a:prstGeom prst="rect">
             <a:avLst/>
@@ -15247,7 +17554,7 @@
           <a:lstStyle/>
           <a:p>
             <a:pPr>
-              <a:defRPr sz="980">
+              <a:defRPr sz="919">
                 <a:solidFill>
                   <a:srgbClr val="F5F5F5"/>
                 </a:solidFill>
@@ -15311,6 +17618,142 @@
             <a:br/>
             <a:r>
               <a:t>}</a:t>
+            </a:r>
+          </a:p>
+        </p:txBody>
+      </p:sp>
+      <p:sp>
+        <p:nvSpPr>
+          <p:cNvPr id="15" name="Rectangle 14"/>
+          <p:cNvSpPr/>
+          <p:nvPr/>
+        </p:nvSpPr>
+        <p:spPr>
+          <a:xfrm>
+            <a:off x="5660136" y="5669280"/>
+            <a:ext cx="5608015" cy="548640"/>
+          </a:xfrm>
+          <a:prstGeom prst="rect">
+            <a:avLst/>
+          </a:prstGeom>
+          <a:solidFill>
+            <a:srgbClr val="000000"/>
+          </a:solidFill>
+          <a:ln>
+            <a:noFill/>
+          </a:ln>
+        </p:spPr>
+        <p:style>
+          <a:lnRef idx="1">
+            <a:schemeClr val="accent1"/>
+          </a:lnRef>
+          <a:fillRef idx="3">
+            <a:schemeClr val="accent1"/>
+          </a:fillRef>
+          <a:effectRef idx="2">
+            <a:schemeClr val="accent1"/>
+          </a:effectRef>
+          <a:fontRef idx="minor">
+            <a:schemeClr val="lt1"/>
+          </a:fontRef>
+        </p:style>
+        <p:txBody>
+          <a:bodyPr rtlCol="0" anchor="ctr"/>
+          <a:lstStyle/>
+          <a:p>
+            <a:pPr algn="ctr"/>
+          </a:p>
+        </p:txBody>
+      </p:sp>
+      <p:sp>
+        <p:nvSpPr>
+          <p:cNvPr id="16" name="Rectangle 15"/>
+          <p:cNvSpPr/>
+          <p:nvPr/>
+        </p:nvSpPr>
+        <p:spPr>
+          <a:xfrm>
+            <a:off x="5623560" y="5632704"/>
+            <a:ext cx="5608015" cy="548640"/>
+          </a:xfrm>
+          <a:prstGeom prst="rect">
+            <a:avLst/>
+          </a:prstGeom>
+          <a:solidFill>
+            <a:srgbClr val="FFE600"/>
+          </a:solidFill>
+          <a:ln w="25400">
+            <a:solidFill>
+              <a:srgbClr val="000000"/>
+            </a:solidFill>
+          </a:ln>
+        </p:spPr>
+        <p:style>
+          <a:lnRef idx="1">
+            <a:schemeClr val="accent1"/>
+          </a:lnRef>
+          <a:fillRef idx="3">
+            <a:schemeClr val="accent1"/>
+          </a:fillRef>
+          <a:effectRef idx="2">
+            <a:schemeClr val="accent1"/>
+          </a:effectRef>
+          <a:fontRef idx="minor">
+            <a:schemeClr val="lt1"/>
+          </a:fontRef>
+        </p:style>
+        <p:txBody>
+          <a:bodyPr rtlCol="0" anchor="ctr"/>
+          <a:lstStyle/>
+          <a:p>
+            <a:pPr algn="ctr"/>
+          </a:p>
+        </p:txBody>
+      </p:sp>
+      <p:sp>
+        <p:nvSpPr>
+          <p:cNvPr id="17" name="TextBox 16"/>
+          <p:cNvSpPr txBox="1"/>
+          <p:nvPr/>
+        </p:nvSpPr>
+        <p:spPr>
+          <a:xfrm>
+            <a:off x="5696712" y="5660136"/>
+            <a:ext cx="5461711" cy="493776"/>
+          </a:xfrm>
+          <a:prstGeom prst="rect">
+            <a:avLst/>
+          </a:prstGeom>
+          <a:noFill/>
+        </p:spPr>
+        <p:txBody>
+          <a:bodyPr wrap="square">
+            <a:spAutoFit/>
+          </a:bodyPr>
+          <a:lstStyle/>
+          <a:p>
+            <a:r>
+              <a:rPr sz="960" b="1">
+                <a:solidFill>
+                  <a:srgbClr val="000000"/>
+                </a:solidFill>
+                <a:latin typeface="Segoe UI"/>
+                <a:hlinkClick r:id="rId2"/>
+              </a:rPr>
+              <a:t>▶ BUKA KODE LENGKAP DI GITHUB (slide_04_materialapp_dan_scaffold.dart)</a:t>
+            </a:r>
+          </a:p>
+          <a:p>
+            <a:pPr>
+              <a:defRPr sz="760">
+                <a:solidFill>
+                  <a:srgbClr val="3C3C3C"/>
+                </a:solidFill>
+                <a:latin typeface="Segoe UI"/>
+              </a:defRPr>
+            </a:pPr>
+            <a:r>
+              <a:t>💡 Buka di browser / salin source code: github.com/antonprafanto/mobile2026</a:t>
             </a:r>
           </a:p>
         </p:txBody>
@@ -15917,8 +18360,8 @@
         </p:nvSpPr>
         <p:spPr>
           <a:xfrm>
-            <a:off x="5669280" y="2176272"/>
-            <a:ext cx="5486400" cy="3977639"/>
+            <a:off x="5669280" y="2121408"/>
+            <a:ext cx="5486400" cy="3364992"/>
           </a:xfrm>
           <a:prstGeom prst="rect">
             <a:avLst/>
@@ -15932,7 +18375,7 @@
           <a:lstStyle/>
           <a:p>
             <a:pPr>
-              <a:defRPr sz="980">
+              <a:defRPr sz="919">
                 <a:solidFill>
                   <a:srgbClr val="F5F5F5"/>
                 </a:solidFill>
@@ -15979,6 +18422,142 @@
             <a:br/>
             <a:r>
               <a:t>// RenderBox mengukur koordinat piksel &amp; melukis warna.</a:t>
+            </a:r>
+          </a:p>
+        </p:txBody>
+      </p:sp>
+      <p:sp>
+        <p:nvSpPr>
+          <p:cNvPr id="15" name="Rectangle 14"/>
+          <p:cNvSpPr/>
+          <p:nvPr/>
+        </p:nvSpPr>
+        <p:spPr>
+          <a:xfrm>
+            <a:off x="5660136" y="5669280"/>
+            <a:ext cx="5608015" cy="548640"/>
+          </a:xfrm>
+          <a:prstGeom prst="rect">
+            <a:avLst/>
+          </a:prstGeom>
+          <a:solidFill>
+            <a:srgbClr val="000000"/>
+          </a:solidFill>
+          <a:ln>
+            <a:noFill/>
+          </a:ln>
+        </p:spPr>
+        <p:style>
+          <a:lnRef idx="1">
+            <a:schemeClr val="accent1"/>
+          </a:lnRef>
+          <a:fillRef idx="3">
+            <a:schemeClr val="accent1"/>
+          </a:fillRef>
+          <a:effectRef idx="2">
+            <a:schemeClr val="accent1"/>
+          </a:effectRef>
+          <a:fontRef idx="minor">
+            <a:schemeClr val="lt1"/>
+          </a:fontRef>
+        </p:style>
+        <p:txBody>
+          <a:bodyPr rtlCol="0" anchor="ctr"/>
+          <a:lstStyle/>
+          <a:p>
+            <a:pPr algn="ctr"/>
+          </a:p>
+        </p:txBody>
+      </p:sp>
+      <p:sp>
+        <p:nvSpPr>
+          <p:cNvPr id="16" name="Rectangle 15"/>
+          <p:cNvSpPr/>
+          <p:nvPr/>
+        </p:nvSpPr>
+        <p:spPr>
+          <a:xfrm>
+            <a:off x="5623560" y="5632704"/>
+            <a:ext cx="5608015" cy="548640"/>
+          </a:xfrm>
+          <a:prstGeom prst="rect">
+            <a:avLst/>
+          </a:prstGeom>
+          <a:solidFill>
+            <a:srgbClr val="FFE600"/>
+          </a:solidFill>
+          <a:ln w="25400">
+            <a:solidFill>
+              <a:srgbClr val="000000"/>
+            </a:solidFill>
+          </a:ln>
+        </p:spPr>
+        <p:style>
+          <a:lnRef idx="1">
+            <a:schemeClr val="accent1"/>
+          </a:lnRef>
+          <a:fillRef idx="3">
+            <a:schemeClr val="accent1"/>
+          </a:fillRef>
+          <a:effectRef idx="2">
+            <a:schemeClr val="accent1"/>
+          </a:effectRef>
+          <a:fontRef idx="minor">
+            <a:schemeClr val="lt1"/>
+          </a:fontRef>
+        </p:style>
+        <p:txBody>
+          <a:bodyPr rtlCol="0" anchor="ctr"/>
+          <a:lstStyle/>
+          <a:p>
+            <a:pPr algn="ctr"/>
+          </a:p>
+        </p:txBody>
+      </p:sp>
+      <p:sp>
+        <p:nvSpPr>
+          <p:cNvPr id="17" name="TextBox 16"/>
+          <p:cNvSpPr txBox="1"/>
+          <p:nvPr/>
+        </p:nvSpPr>
+        <p:spPr>
+          <a:xfrm>
+            <a:off x="5696712" y="5660136"/>
+            <a:ext cx="5461711" cy="493776"/>
+          </a:xfrm>
+          <a:prstGeom prst="rect">
+            <a:avLst/>
+          </a:prstGeom>
+          <a:noFill/>
+        </p:spPr>
+        <p:txBody>
+          <a:bodyPr wrap="square">
+            <a:spAutoFit/>
+          </a:bodyPr>
+          <a:lstStyle/>
+          <a:p>
+            <a:r>
+              <a:rPr sz="960" b="1">
+                <a:solidFill>
+                  <a:srgbClr val="000000"/>
+                </a:solidFill>
+                <a:latin typeface="Segoe UI"/>
+                <a:hlinkClick r:id="rId2"/>
+              </a:rPr>
+              <a:t>▶ BUKA KODE LENGKAP DI GITHUB (slide_05_arsitektur_the_three_trees.dart)</a:t>
+            </a:r>
+          </a:p>
+          <a:p>
+            <a:pPr>
+              <a:defRPr sz="760">
+                <a:solidFill>
+                  <a:srgbClr val="3C3C3C"/>
+                </a:solidFill>
+                <a:latin typeface="Segoe UI"/>
+              </a:defRPr>
+            </a:pPr>
+            <a:r>
+              <a:t>💡 Buka di browser / salin source code: github.com/antonprafanto/mobile2026</a:t>
             </a:r>
           </a:p>
         </p:txBody>
@@ -16585,8 +19164,8 @@
         </p:nvSpPr>
         <p:spPr>
           <a:xfrm>
-            <a:off x="5669280" y="2176272"/>
-            <a:ext cx="5486400" cy="3977639"/>
+            <a:off x="5669280" y="2121408"/>
+            <a:ext cx="5486400" cy="3364992"/>
           </a:xfrm>
           <a:prstGeom prst="rect">
             <a:avLst/>
@@ -16600,7 +19179,7 @@
           <a:lstStyle/>
           <a:p>
             <a:pPr>
-              <a:defRPr sz="980">
+              <a:defRPr sz="919">
                 <a:solidFill>
                   <a:srgbClr val="F5F5F5"/>
                 </a:solidFill>
@@ -16670,6 +19249,142 @@
             <a:br/>
             <a:r>
               <a:t>}</a:t>
+            </a:r>
+          </a:p>
+        </p:txBody>
+      </p:sp>
+      <p:sp>
+        <p:nvSpPr>
+          <p:cNvPr id="15" name="Rectangle 14"/>
+          <p:cNvSpPr/>
+          <p:nvPr/>
+        </p:nvSpPr>
+        <p:spPr>
+          <a:xfrm>
+            <a:off x="5660136" y="5669280"/>
+            <a:ext cx="5608015" cy="548640"/>
+          </a:xfrm>
+          <a:prstGeom prst="rect">
+            <a:avLst/>
+          </a:prstGeom>
+          <a:solidFill>
+            <a:srgbClr val="000000"/>
+          </a:solidFill>
+          <a:ln>
+            <a:noFill/>
+          </a:ln>
+        </p:spPr>
+        <p:style>
+          <a:lnRef idx="1">
+            <a:schemeClr val="accent1"/>
+          </a:lnRef>
+          <a:fillRef idx="3">
+            <a:schemeClr val="accent1"/>
+          </a:fillRef>
+          <a:effectRef idx="2">
+            <a:schemeClr val="accent1"/>
+          </a:effectRef>
+          <a:fontRef idx="minor">
+            <a:schemeClr val="lt1"/>
+          </a:fontRef>
+        </p:style>
+        <p:txBody>
+          <a:bodyPr rtlCol="0" anchor="ctr"/>
+          <a:lstStyle/>
+          <a:p>
+            <a:pPr algn="ctr"/>
+          </a:p>
+        </p:txBody>
+      </p:sp>
+      <p:sp>
+        <p:nvSpPr>
+          <p:cNvPr id="16" name="Rectangle 15"/>
+          <p:cNvSpPr/>
+          <p:nvPr/>
+        </p:nvSpPr>
+        <p:spPr>
+          <a:xfrm>
+            <a:off x="5623560" y="5632704"/>
+            <a:ext cx="5608015" cy="548640"/>
+          </a:xfrm>
+          <a:prstGeom prst="rect">
+            <a:avLst/>
+          </a:prstGeom>
+          <a:solidFill>
+            <a:srgbClr val="FFE600"/>
+          </a:solidFill>
+          <a:ln w="25400">
+            <a:solidFill>
+              <a:srgbClr val="000000"/>
+            </a:solidFill>
+          </a:ln>
+        </p:spPr>
+        <p:style>
+          <a:lnRef idx="1">
+            <a:schemeClr val="accent1"/>
+          </a:lnRef>
+          <a:fillRef idx="3">
+            <a:schemeClr val="accent1"/>
+          </a:fillRef>
+          <a:effectRef idx="2">
+            <a:schemeClr val="accent1"/>
+          </a:effectRef>
+          <a:fontRef idx="minor">
+            <a:schemeClr val="lt1"/>
+          </a:fontRef>
+        </p:style>
+        <p:txBody>
+          <a:bodyPr rtlCol="0" anchor="ctr"/>
+          <a:lstStyle/>
+          <a:p>
+            <a:pPr algn="ctr"/>
+          </a:p>
+        </p:txBody>
+      </p:sp>
+      <p:sp>
+        <p:nvSpPr>
+          <p:cNvPr id="17" name="TextBox 16"/>
+          <p:cNvSpPr txBox="1"/>
+          <p:nvPr/>
+        </p:nvSpPr>
+        <p:spPr>
+          <a:xfrm>
+            <a:off x="5696712" y="5660136"/>
+            <a:ext cx="5461711" cy="493776"/>
+          </a:xfrm>
+          <a:prstGeom prst="rect">
+            <a:avLst/>
+          </a:prstGeom>
+          <a:noFill/>
+        </p:spPr>
+        <p:txBody>
+          <a:bodyPr wrap="square">
+            <a:spAutoFit/>
+          </a:bodyPr>
+          <a:lstStyle/>
+          <a:p>
+            <a:r>
+              <a:rPr sz="960" b="1">
+                <a:solidFill>
+                  <a:srgbClr val="000000"/>
+                </a:solidFill>
+                <a:latin typeface="Segoe UI"/>
+                <a:hlinkClick r:id="rId2"/>
+              </a:rPr>
+              <a:t>▶ BUKA KODE LENGKAP DI GITHUB (slide_06_stateless_vs_stateful.dart)</a:t>
+            </a:r>
+          </a:p>
+          <a:p>
+            <a:pPr>
+              <a:defRPr sz="760">
+                <a:solidFill>
+                  <a:srgbClr val="3C3C3C"/>
+                </a:solidFill>
+                <a:latin typeface="Segoe UI"/>
+              </a:defRPr>
+            </a:pPr>
+            <a:r>
+              <a:t>💡 Buka di browser / salin source code: github.com/antonprafanto/mobile2026</a:t>
             </a:r>
           </a:p>
         </p:txBody>
@@ -17260,8 +19975,8 @@
         </p:nvSpPr>
         <p:spPr>
           <a:xfrm>
-            <a:off x="5669280" y="2176272"/>
-            <a:ext cx="5486400" cy="3977639"/>
+            <a:off x="5669280" y="2121408"/>
+            <a:ext cx="5486400" cy="3364992"/>
           </a:xfrm>
           <a:prstGeom prst="rect">
             <a:avLst/>
@@ -17275,7 +19990,7 @@
           <a:lstStyle/>
           <a:p>
             <a:pPr>
-              <a:defRPr sz="980">
+              <a:defRPr sz="919">
                 <a:solidFill>
                   <a:srgbClr val="F5F5F5"/>
                 </a:solidFill>
@@ -17351,6 +20066,142 @@
             <a:br/>
             <a:r>
               <a:t>}</a:t>
+            </a:r>
+          </a:p>
+        </p:txBody>
+      </p:sp>
+      <p:sp>
+        <p:nvSpPr>
+          <p:cNvPr id="15" name="Rectangle 14"/>
+          <p:cNvSpPr/>
+          <p:nvPr/>
+        </p:nvSpPr>
+        <p:spPr>
+          <a:xfrm>
+            <a:off x="5660136" y="5669280"/>
+            <a:ext cx="5608015" cy="548640"/>
+          </a:xfrm>
+          <a:prstGeom prst="rect">
+            <a:avLst/>
+          </a:prstGeom>
+          <a:solidFill>
+            <a:srgbClr val="000000"/>
+          </a:solidFill>
+          <a:ln>
+            <a:noFill/>
+          </a:ln>
+        </p:spPr>
+        <p:style>
+          <a:lnRef idx="1">
+            <a:schemeClr val="accent1"/>
+          </a:lnRef>
+          <a:fillRef idx="3">
+            <a:schemeClr val="accent1"/>
+          </a:fillRef>
+          <a:effectRef idx="2">
+            <a:schemeClr val="accent1"/>
+          </a:effectRef>
+          <a:fontRef idx="minor">
+            <a:schemeClr val="lt1"/>
+          </a:fontRef>
+        </p:style>
+        <p:txBody>
+          <a:bodyPr rtlCol="0" anchor="ctr"/>
+          <a:lstStyle/>
+          <a:p>
+            <a:pPr algn="ctr"/>
+          </a:p>
+        </p:txBody>
+      </p:sp>
+      <p:sp>
+        <p:nvSpPr>
+          <p:cNvPr id="16" name="Rectangle 15"/>
+          <p:cNvSpPr/>
+          <p:nvPr/>
+        </p:nvSpPr>
+        <p:spPr>
+          <a:xfrm>
+            <a:off x="5623560" y="5632704"/>
+            <a:ext cx="5608015" cy="548640"/>
+          </a:xfrm>
+          <a:prstGeom prst="rect">
+            <a:avLst/>
+          </a:prstGeom>
+          <a:solidFill>
+            <a:srgbClr val="FFE600"/>
+          </a:solidFill>
+          <a:ln w="25400">
+            <a:solidFill>
+              <a:srgbClr val="000000"/>
+            </a:solidFill>
+          </a:ln>
+        </p:spPr>
+        <p:style>
+          <a:lnRef idx="1">
+            <a:schemeClr val="accent1"/>
+          </a:lnRef>
+          <a:fillRef idx="3">
+            <a:schemeClr val="accent1"/>
+          </a:fillRef>
+          <a:effectRef idx="2">
+            <a:schemeClr val="accent1"/>
+          </a:effectRef>
+          <a:fontRef idx="minor">
+            <a:schemeClr val="lt1"/>
+          </a:fontRef>
+        </p:style>
+        <p:txBody>
+          <a:bodyPr rtlCol="0" anchor="ctr"/>
+          <a:lstStyle/>
+          <a:p>
+            <a:pPr algn="ctr"/>
+          </a:p>
+        </p:txBody>
+      </p:sp>
+      <p:sp>
+        <p:nvSpPr>
+          <p:cNvPr id="17" name="TextBox 16"/>
+          <p:cNvSpPr txBox="1"/>
+          <p:nvPr/>
+        </p:nvSpPr>
+        <p:spPr>
+          <a:xfrm>
+            <a:off x="5696712" y="5660136"/>
+            <a:ext cx="5461711" cy="493776"/>
+          </a:xfrm>
+          <a:prstGeom prst="rect">
+            <a:avLst/>
+          </a:prstGeom>
+          <a:noFill/>
+        </p:spPr>
+        <p:txBody>
+          <a:bodyPr wrap="square">
+            <a:spAutoFit/>
+          </a:bodyPr>
+          <a:lstStyle/>
+          <a:p>
+            <a:r>
+              <a:rPr sz="960" b="1">
+                <a:solidFill>
+                  <a:srgbClr val="000000"/>
+                </a:solidFill>
+                <a:latin typeface="Segoe UI"/>
+                <a:hlinkClick r:id="rId2"/>
+              </a:rPr>
+              <a:t>▶ BUKA KODE LENGKAP DI GITHUB (slide_07_siklus_hidup_stateful.dart)</a:t>
+            </a:r>
+          </a:p>
+          <a:p>
+            <a:pPr>
+              <a:defRPr sz="760">
+                <a:solidFill>
+                  <a:srgbClr val="3C3C3C"/>
+                </a:solidFill>
+                <a:latin typeface="Segoe UI"/>
+              </a:defRPr>
+            </a:pPr>
+            <a:r>
+              <a:t>💡 Buka di browser / salin source code: github.com/antonprafanto/mobile2026</a:t>
             </a:r>
           </a:p>
         </p:txBody>
@@ -17957,8 +20808,8 @@
         </p:nvSpPr>
         <p:spPr>
           <a:xfrm>
-            <a:off x="5669280" y="2176272"/>
-            <a:ext cx="5486400" cy="3977639"/>
+            <a:off x="5669280" y="2121408"/>
+            <a:ext cx="5486400" cy="3364992"/>
           </a:xfrm>
           <a:prstGeom prst="rect">
             <a:avLst/>
@@ -17972,7 +20823,7 @@
           <a:lstStyle/>
           <a:p>
             <a:pPr>
-              <a:defRPr sz="980">
+              <a:defRPr sz="919">
                 <a:solidFill>
                   <a:srgbClr val="F5F5F5"/>
                 </a:solidFill>
@@ -18017,6 +20868,142 @@
             <a:br/>
             <a:r>
               <a:t>)</a:t>
+            </a:r>
+          </a:p>
+        </p:txBody>
+      </p:sp>
+      <p:sp>
+        <p:nvSpPr>
+          <p:cNvPr id="15" name="Rectangle 14"/>
+          <p:cNvSpPr/>
+          <p:nvPr/>
+        </p:nvSpPr>
+        <p:spPr>
+          <a:xfrm>
+            <a:off x="5660136" y="5669280"/>
+            <a:ext cx="5608015" cy="548640"/>
+          </a:xfrm>
+          <a:prstGeom prst="rect">
+            <a:avLst/>
+          </a:prstGeom>
+          <a:solidFill>
+            <a:srgbClr val="000000"/>
+          </a:solidFill>
+          <a:ln>
+            <a:noFill/>
+          </a:ln>
+        </p:spPr>
+        <p:style>
+          <a:lnRef idx="1">
+            <a:schemeClr val="accent1"/>
+          </a:lnRef>
+          <a:fillRef idx="3">
+            <a:schemeClr val="accent1"/>
+          </a:fillRef>
+          <a:effectRef idx="2">
+            <a:schemeClr val="accent1"/>
+          </a:effectRef>
+          <a:fontRef idx="minor">
+            <a:schemeClr val="lt1"/>
+          </a:fontRef>
+        </p:style>
+        <p:txBody>
+          <a:bodyPr rtlCol="0" anchor="ctr"/>
+          <a:lstStyle/>
+          <a:p>
+            <a:pPr algn="ctr"/>
+          </a:p>
+        </p:txBody>
+      </p:sp>
+      <p:sp>
+        <p:nvSpPr>
+          <p:cNvPr id="16" name="Rectangle 15"/>
+          <p:cNvSpPr/>
+          <p:nvPr/>
+        </p:nvSpPr>
+        <p:spPr>
+          <a:xfrm>
+            <a:off x="5623560" y="5632704"/>
+            <a:ext cx="5608015" cy="548640"/>
+          </a:xfrm>
+          <a:prstGeom prst="rect">
+            <a:avLst/>
+          </a:prstGeom>
+          <a:solidFill>
+            <a:srgbClr val="FFE600"/>
+          </a:solidFill>
+          <a:ln w="25400">
+            <a:solidFill>
+              <a:srgbClr val="000000"/>
+            </a:solidFill>
+          </a:ln>
+        </p:spPr>
+        <p:style>
+          <a:lnRef idx="1">
+            <a:schemeClr val="accent1"/>
+          </a:lnRef>
+          <a:fillRef idx="3">
+            <a:schemeClr val="accent1"/>
+          </a:fillRef>
+          <a:effectRef idx="2">
+            <a:schemeClr val="accent1"/>
+          </a:effectRef>
+          <a:fontRef idx="minor">
+            <a:schemeClr val="lt1"/>
+          </a:fontRef>
+        </p:style>
+        <p:txBody>
+          <a:bodyPr rtlCol="0" anchor="ctr"/>
+          <a:lstStyle/>
+          <a:p>
+            <a:pPr algn="ctr"/>
+          </a:p>
+        </p:txBody>
+      </p:sp>
+      <p:sp>
+        <p:nvSpPr>
+          <p:cNvPr id="17" name="TextBox 16"/>
+          <p:cNvSpPr txBox="1"/>
+          <p:nvPr/>
+        </p:nvSpPr>
+        <p:spPr>
+          <a:xfrm>
+            <a:off x="5696712" y="5660136"/>
+            <a:ext cx="5461711" cy="493776"/>
+          </a:xfrm>
+          <a:prstGeom prst="rect">
+            <a:avLst/>
+          </a:prstGeom>
+          <a:noFill/>
+        </p:spPr>
+        <p:txBody>
+          <a:bodyPr wrap="square">
+            <a:spAutoFit/>
+          </a:bodyPr>
+          <a:lstStyle/>
+          <a:p>
+            <a:r>
+              <a:rPr sz="960" b="1">
+                <a:solidFill>
+                  <a:srgbClr val="000000"/>
+                </a:solidFill>
+                <a:latin typeface="Segoe UI"/>
+                <a:hlinkClick r:id="rId2"/>
+              </a:rPr>
+              <a:t>▶ BUKA KODE LENGKAP DI GITHUB (slide_08_hukum_box_constraints.dart)</a:t>
+            </a:r>
+          </a:p>
+          <a:p>
+            <a:pPr>
+              <a:defRPr sz="760">
+                <a:solidFill>
+                  <a:srgbClr val="3C3C3C"/>
+                </a:solidFill>
+                <a:latin typeface="Segoe UI"/>
+              </a:defRPr>
+            </a:pPr>
+            <a:r>
+              <a:t>💡 Buka di browser / salin source code: github.com/antonprafanto/mobile2026</a:t>
             </a:r>
           </a:p>
         </p:txBody>
@@ -18607,8 +21594,8 @@
         </p:nvSpPr>
         <p:spPr>
           <a:xfrm>
-            <a:off x="5669280" y="2176272"/>
-            <a:ext cx="5486400" cy="3977639"/>
+            <a:off x="5669280" y="2121408"/>
+            <a:ext cx="5486400" cy="3364992"/>
           </a:xfrm>
           <a:prstGeom prst="rect">
             <a:avLst/>
@@ -18622,7 +21609,7 @@
           <a:lstStyle/>
           <a:p>
             <a:pPr>
-              <a:defRPr sz="980">
+              <a:defRPr sz="919">
                 <a:solidFill>
                   <a:srgbClr val="F5F5F5"/>
                 </a:solidFill>
@@ -18688,6 +21675,142 @@
             <a:br/>
             <a:r>
               <a:t>}</a:t>
+            </a:r>
+          </a:p>
+        </p:txBody>
+      </p:sp>
+      <p:sp>
+        <p:nvSpPr>
+          <p:cNvPr id="15" name="Rectangle 14"/>
+          <p:cNvSpPr/>
+          <p:nvPr/>
+        </p:nvSpPr>
+        <p:spPr>
+          <a:xfrm>
+            <a:off x="5660136" y="5669280"/>
+            <a:ext cx="5608015" cy="548640"/>
+          </a:xfrm>
+          <a:prstGeom prst="rect">
+            <a:avLst/>
+          </a:prstGeom>
+          <a:solidFill>
+            <a:srgbClr val="000000"/>
+          </a:solidFill>
+          <a:ln>
+            <a:noFill/>
+          </a:ln>
+        </p:spPr>
+        <p:style>
+          <a:lnRef idx="1">
+            <a:schemeClr val="accent1"/>
+          </a:lnRef>
+          <a:fillRef idx="3">
+            <a:schemeClr val="accent1"/>
+          </a:fillRef>
+          <a:effectRef idx="2">
+            <a:schemeClr val="accent1"/>
+          </a:effectRef>
+          <a:fontRef idx="minor">
+            <a:schemeClr val="lt1"/>
+          </a:fontRef>
+        </p:style>
+        <p:txBody>
+          <a:bodyPr rtlCol="0" anchor="ctr"/>
+          <a:lstStyle/>
+          <a:p>
+            <a:pPr algn="ctr"/>
+          </a:p>
+        </p:txBody>
+      </p:sp>
+      <p:sp>
+        <p:nvSpPr>
+          <p:cNvPr id="16" name="Rectangle 15"/>
+          <p:cNvSpPr/>
+          <p:nvPr/>
+        </p:nvSpPr>
+        <p:spPr>
+          <a:xfrm>
+            <a:off x="5623560" y="5632704"/>
+            <a:ext cx="5608015" cy="548640"/>
+          </a:xfrm>
+          <a:prstGeom prst="rect">
+            <a:avLst/>
+          </a:prstGeom>
+          <a:solidFill>
+            <a:srgbClr val="FFE600"/>
+          </a:solidFill>
+          <a:ln w="25400">
+            <a:solidFill>
+              <a:srgbClr val="000000"/>
+            </a:solidFill>
+          </a:ln>
+        </p:spPr>
+        <p:style>
+          <a:lnRef idx="1">
+            <a:schemeClr val="accent1"/>
+          </a:lnRef>
+          <a:fillRef idx="3">
+            <a:schemeClr val="accent1"/>
+          </a:fillRef>
+          <a:effectRef idx="2">
+            <a:schemeClr val="accent1"/>
+          </a:effectRef>
+          <a:fontRef idx="minor">
+            <a:schemeClr val="lt1"/>
+          </a:fontRef>
+        </p:style>
+        <p:txBody>
+          <a:bodyPr rtlCol="0" anchor="ctr"/>
+          <a:lstStyle/>
+          <a:p>
+            <a:pPr algn="ctr"/>
+          </a:p>
+        </p:txBody>
+      </p:sp>
+      <p:sp>
+        <p:nvSpPr>
+          <p:cNvPr id="17" name="TextBox 16"/>
+          <p:cNvSpPr txBox="1"/>
+          <p:nvPr/>
+        </p:nvSpPr>
+        <p:spPr>
+          <a:xfrm>
+            <a:off x="5696712" y="5660136"/>
+            <a:ext cx="5461711" cy="493776"/>
+          </a:xfrm>
+          <a:prstGeom prst="rect">
+            <a:avLst/>
+          </a:prstGeom>
+          <a:noFill/>
+        </p:spPr>
+        <p:txBody>
+          <a:bodyPr wrap="square">
+            <a:spAutoFit/>
+          </a:bodyPr>
+          <a:lstStyle/>
+          <a:p>
+            <a:r>
+              <a:rPr sz="960" b="1">
+                <a:solidFill>
+                  <a:srgbClr val="000000"/>
+                </a:solidFill>
+                <a:latin typeface="Segoe UI"/>
+                <a:hlinkClick r:id="rId2"/>
+              </a:rPr>
+              <a:t>▶ BUKA KODE LENGKAP DI GITHUB (slide_09_penyelamat_layar_safearea.dart)</a:t>
+            </a:r>
+          </a:p>
+          <a:p>
+            <a:pPr>
+              <a:defRPr sz="760">
+                <a:solidFill>
+                  <a:srgbClr val="3C3C3C"/>
+                </a:solidFill>
+                <a:latin typeface="Segoe UI"/>
+              </a:defRPr>
+            </a:pPr>
+            <a:r>
+              <a:t>💡 Buka di browser / salin source code: github.com/antonprafanto/mobile2026</a:t>
             </a:r>
           </a:p>
         </p:txBody>

--- a/03_slide_presentasi/PERTEMUAN_03_Widget_Tree_dan_Layouting.pptx
+++ b/03_slide_presentasi/PERTEMUAN_03_Widget_Tree_dan_Layouting.pptx
@@ -4203,7 +4203,7 @@
         <p:spPr>
           <a:xfrm>
             <a:off x="896112" y="438912"/>
-            <a:ext cx="2377440" cy="365760"/>
+            <a:ext cx="3177540" cy="365760"/>
           </a:xfrm>
           <a:prstGeom prst="rect">
             <a:avLst/>
@@ -4246,7 +4246,7 @@
         <p:spPr>
           <a:xfrm>
             <a:off x="822960" y="365760"/>
-            <a:ext cx="2377440" cy="365760"/>
+            <a:ext cx="3177540" cy="365760"/>
           </a:xfrm>
           <a:prstGeom prst="rect">
             <a:avLst/>
@@ -4291,7 +4291,7 @@
         <p:spPr>
           <a:xfrm>
             <a:off x="822960" y="365760"/>
-            <a:ext cx="2377440" cy="365760"/>
+            <a:ext cx="3177540" cy="365760"/>
           </a:xfrm>
           <a:prstGeom prst="rect">
             <a:avLst/>
@@ -4313,7 +4313,7 @@
               </a:defRPr>
             </a:pPr>
             <a:r>
-              <a:t>JEBAKAN MAUT LAB</a:t>
+              <a:t>ANALISIS KESALAHAN UMUM</a:t>
             </a:r>
           </a:p>
         </p:txBody>
@@ -4349,7 +4349,7 @@
               </a:defRPr>
             </a:pPr>
             <a:r>
-              <a:t>Jebakan: 'Cannot provide both a color and a decoration'</a:t>
+              <a:t>Kesalahan Umum: 'Cannot provide both a color and a decoration'</a:t>
             </a:r>
           </a:p>
         </p:txBody>
@@ -4492,7 +4492,7 @@
               </a:defRPr>
             </a:pPr>
             <a:r>
-              <a:t>■  Penyebab Galat #1 Mahasiswa Pemula di Minggu ke-3!</a:t>
+              <a:t>■  Penyebab Galat Tata Letak Paling Sering Terjadi di Praktikum!</a:t>
             </a:r>
           </a:p>
           <a:p>
@@ -12414,7 +12414,7 @@
               </a:defRPr>
             </a:pPr>
             <a:r>
-              <a:t>Membasmi Bencana Garis Kuning-Hitam (Overflow)</a:t>
+              <a:t>Mengatasi Galat Tampilan Garis Kuning-Hitam (Overflow)</a:t>
             </a:r>
           </a:p>
         </p:txBody>
@@ -13216,7 +13216,7 @@
               </a:defRPr>
             </a:pPr>
             <a:r>
-              <a:t>Bencana: 'Vertical viewport was given unbounded height'</a:t>
+              <a:t>Mengatasi Galat: 'Vertical viewport was given unbounded height'</a:t>
             </a:r>
           </a:p>
         </p:txBody>
@@ -14034,7 +14034,7 @@
               </a:defRPr>
             </a:pPr>
             <a:r>
-              <a:t>Trik Koma Ajaib: 'Trailing Comma' &amp; Auto-Format</a:t>
+              <a:t>Standar Format Kode: 'Trailing Comma' &amp; Auto-Format</a:t>
             </a:r>
           </a:p>
         </p:txBody>
@@ -14177,7 +14177,7 @@
               </a:defRPr>
             </a:pPr>
             <a:r>
-              <a:t>■  Pusing melihat kode Flutter memanjang ke kanan hingga 300 karakter dalam satu baris?</a:t>
+              <a:t>■  Apakah kode Flutter Anda sering memanjang ke kanan dan sulit dibaca dalam satu baris?</a:t>
             </a:r>
           </a:p>
           <a:p>
@@ -14225,7 +14225,7 @@
               </a:defRPr>
             </a:pPr>
             <a:r>
-              <a:t>■  Tidak perlu lagi pusing mencari pasangan kurung secara manual.</a:t>
+              <a:t>■  Struktur hierarki pohon widget menjadi rapi otomatis tanpa perlu mencari kurung penutup secara manual.</a:t>
             </a:r>
           </a:p>
           <a:p>
@@ -14845,7 +14845,7 @@
               </a:defRPr>
             </a:pPr>
             <a:r>
-              <a:t>Shortcut Sakti: Alt + Enter &amp; Flutter Inspector</a:t>
+              <a:t>Pintasan Produktivitas: Alt + Enter &amp; Flutter Inspector</a:t>
             </a:r>
           </a:p>
         </p:txBody>
@@ -17312,7 +17312,7 @@
               </a:defRPr>
             </a:pPr>
             <a:r>
-              <a:t>■  Bencana Pemula: Jika langsung menulis Text() tanpa Scaffold, layar akan hitam legam dengan teks bergaris bawah kuning ganda!</a:t>
+              <a:t>■  Karakteristik Kanvas: Jika menulis Text() tanpa pembungkus Scaffold/Material, teks akan bergaris bawah kuning ganda tanpa tema bawaan!</a:t>
             </a:r>
           </a:p>
           <a:p>

--- a/03_slide_presentasi/PERTEMUAN_03_Widget_Tree_dan_Layouting.pptx
+++ b/03_slide_presentasi/PERTEMUAN_03_Widget_Tree_dan_Layouting.pptx
@@ -3284,7 +3284,7 @@
               <a:spcAft>
                 <a:spcPts val="1400"/>
               </a:spcAft>
-              <a:defRPr sz="3100" b="1">
+              <a:defRPr sz="3000" b="1">
                 <a:solidFill>
                   <a:srgbClr val="000000"/>
                 </a:solidFill>
@@ -3302,7 +3302,7 @@
           <a:p>
             <a:pPr>
               <a:spcAft>
-                <a:spcPts val="4000"/>
+                <a:spcPts val="3800"/>
               </a:spcAft>
               <a:defRPr sz="1500">
                 <a:solidFill>
@@ -3325,7 +3325,7 @@
               </a:defRPr>
             </a:pPr>
             <a:r>
-              <a:t>■  Program Studi Teknik Informatika  ■  OUTCOME-BASED EDUCATION (OBE)</a:t>
+              <a:t>■  Program Studi Teknik Informatika  ■  OUTCOME-BASED EDUCATION (OBE) • SUB-CPMK 3</a:t>
             </a:r>
           </a:p>
         </p:txBody>
@@ -3673,15 +3673,15 @@
               </a:defRPr>
             </a:pPr>
             <a:r>
-              <a:t>KONSEP &amp; CARA KERJA</a:t>
+              <a:t>KONSEP &amp; ALUR KERJA</a:t>
             </a:r>
           </a:p>
           <a:p>
             <a:pPr>
               <a:spcAft>
-                <a:spcPts val="600"/>
+                <a:spcPts val="500"/>
               </a:spcAft>
-              <a:defRPr sz="1100">
+              <a:defRPr sz="1060">
                 <a:solidFill>
                   <a:srgbClr val="141414"/>
                 </a:solidFill>
@@ -3695,9 +3695,9 @@
           <a:p>
             <a:pPr>
               <a:spcAft>
-                <a:spcPts val="600"/>
+                <a:spcPts val="500"/>
               </a:spcAft>
-              <a:defRPr sz="1100">
+              <a:defRPr sz="1060">
                 <a:solidFill>
                   <a:srgbClr val="141414"/>
                 </a:solidFill>
@@ -3711,9 +3711,9 @@
           <a:p>
             <a:pPr>
               <a:spcAft>
-                <a:spcPts val="600"/>
+                <a:spcPts val="500"/>
               </a:spcAft>
-              <a:defRPr sz="1100">
+              <a:defRPr sz="1060">
                 <a:solidFill>
                   <a:srgbClr val="141414"/>
                 </a:solidFill>
@@ -3726,7 +3726,7 @@
           </a:p>
           <a:p>
             <a:pPr>
-              <a:defRPr sz="1050" b="1">
+              <a:defRPr sz="1019" b="1">
                 <a:solidFill>
                   <a:srgbClr val="000000"/>
                 </a:solidFill>
@@ -3734,7 +3734,7 @@
               </a:defRPr>
             </a:pPr>
             <a:r>
-              <a:t>💡 Tips Praktik: Jangan gunakan Container jika Anda hanya butuh jarak spasi kosong, gunakan Padding atau SizedBox!</a:t>
+              <a:t>💡 Tips Praktis: Jangan gunakan Container jika Anda hanya butuh jarak spasi kosong, gunakan Padding atau SizedBox!</a:t>
             </a:r>
           </a:p>
         </p:txBody>
@@ -3903,7 +3903,7 @@
               </a:defRPr>
             </a:pPr>
             <a:r>
-              <a:t>single_child_demo.dart  |  CONTOH KODE BERSIH</a:t>
+              <a:t>single_child_demo.dart  |  KODE IMPLEMENTASI</a:t>
             </a:r>
           </a:p>
         </p:txBody>
@@ -3931,7 +3931,7 @@
           <a:lstStyle/>
           <a:p>
             <a:pPr>
-              <a:defRPr sz="919">
+              <a:defRPr sz="910">
                 <a:solidFill>
                   <a:srgbClr val="F5F5F5"/>
                 </a:solidFill>
@@ -4476,15 +4476,15 @@
               </a:defRPr>
             </a:pPr>
             <a:r>
-              <a:t>KONSEP &amp; CARA KERJA</a:t>
+              <a:t>KONSEP &amp; ALUR KERJA</a:t>
             </a:r>
           </a:p>
           <a:p>
             <a:pPr>
               <a:spcAft>
-                <a:spcPts val="600"/>
+                <a:spcPts val="500"/>
               </a:spcAft>
-              <a:defRPr sz="1100">
+              <a:defRPr sz="1060">
                 <a:solidFill>
                   <a:srgbClr val="141414"/>
                 </a:solidFill>
@@ -4498,9 +4498,9 @@
           <a:p>
             <a:pPr>
               <a:spcAft>
-                <a:spcPts val="600"/>
+                <a:spcPts val="500"/>
               </a:spcAft>
-              <a:defRPr sz="1100">
+              <a:defRPr sz="1060">
                 <a:solidFill>
                   <a:srgbClr val="141414"/>
                 </a:solidFill>
@@ -4514,9 +4514,9 @@
           <a:p>
             <a:pPr>
               <a:spcAft>
-                <a:spcPts val="600"/>
+                <a:spcPts val="500"/>
               </a:spcAft>
-              <a:defRPr sz="1100">
+              <a:defRPr sz="1060">
                 <a:solidFill>
                   <a:srgbClr val="141414"/>
                 </a:solidFill>
@@ -4529,7 +4529,7 @@
           </a:p>
           <a:p>
             <a:pPr>
-              <a:defRPr sz="1050" b="1">
+              <a:defRPr sz="1019" b="1">
                 <a:solidFill>
                   <a:srgbClr val="000000"/>
                 </a:solidFill>
@@ -4537,7 +4537,7 @@
               </a:defRPr>
             </a:pPr>
             <a:r>
-              <a:t>💡 Tips Praktik: Ingat rumusnya: Begitu ada BoxDecoration, warna di luar wajib dicoret dan dipindah ke dalam!</a:t>
+              <a:t>💡 Tips Praktis: Ingat rumusnya: Begitu ada BoxDecoration, warna di luar wajib dicoret dan dipindah ke dalam!</a:t>
             </a:r>
           </a:p>
         </p:txBody>
@@ -4645,7 +4645,7 @@
             <a:avLst/>
           </a:prstGeom>
           <a:solidFill>
-            <a:srgbClr val="FFE600"/>
+            <a:srgbClr val="FB7185"/>
           </a:solidFill>
           <a:ln w="31750">
             <a:solidFill>
@@ -4706,7 +4706,7 @@
               </a:defRPr>
             </a:pPr>
             <a:r>
-              <a:t>box_decoration_fix.dart  |  CONTOH KODE BERSIH</a:t>
+              <a:t>box_decoration_fix.dart  |  KODE IMPLEMENTASI</a:t>
             </a:r>
           </a:p>
         </p:txBody>
@@ -4734,7 +4734,7 @@
           <a:lstStyle/>
           <a:p>
             <a:pPr>
-              <a:defRPr sz="919">
+              <a:defRPr sz="910">
                 <a:solidFill>
                   <a:srgbClr val="F5F5F5"/>
                 </a:solidFill>
@@ -5279,15 +5279,15 @@
               </a:defRPr>
             </a:pPr>
             <a:r>
-              <a:t>KONSEP &amp; CARA KERJA</a:t>
+              <a:t>KONSEP &amp; ALUR KERJA</a:t>
             </a:r>
           </a:p>
           <a:p>
             <a:pPr>
               <a:spcAft>
-                <a:spcPts val="600"/>
+                <a:spcPts val="500"/>
               </a:spcAft>
-              <a:defRPr sz="1100">
+              <a:defRPr sz="1060">
                 <a:solidFill>
                   <a:srgbClr val="141414"/>
                 </a:solidFill>
@@ -5301,9 +5301,9 @@
           <a:p>
             <a:pPr>
               <a:spcAft>
-                <a:spcPts val="600"/>
+                <a:spcPts val="500"/>
               </a:spcAft>
-              <a:defRPr sz="1100">
+              <a:defRPr sz="1060">
                 <a:solidFill>
                   <a:srgbClr val="141414"/>
                 </a:solidFill>
@@ -5317,9 +5317,9 @@
           <a:p>
             <a:pPr>
               <a:spcAft>
-                <a:spcPts val="600"/>
+                <a:spcPts val="500"/>
               </a:spcAft>
-              <a:defRPr sz="1100">
+              <a:defRPr sz="1060">
                 <a:solidFill>
                   <a:srgbClr val="141414"/>
                 </a:solidFill>
@@ -5333,9 +5333,9 @@
           <a:p>
             <a:pPr>
               <a:spcAft>
-                <a:spcPts val="600"/>
+                <a:spcPts val="500"/>
               </a:spcAft>
-              <a:defRPr sz="1100">
+              <a:defRPr sz="1060">
                 <a:solidFill>
                   <a:srgbClr val="141414"/>
                 </a:solidFill>
@@ -5348,7 +5348,7 @@
           </a:p>
           <a:p>
             <a:pPr>
-              <a:defRPr sz="1050" b="1">
+              <a:defRPr sz="1019" b="1">
                 <a:solidFill>
                   <a:srgbClr val="000000"/>
                 </a:solidFill>
@@ -5356,7 +5356,7 @@
               </a:defRPr>
             </a:pPr>
             <a:r>
-              <a:t>💡 Tips Praktik: Gunakan MainAxisAlignment.spaceBetween untuk memisahkan judul di kiri dan aksi di kanan!</a:t>
+              <a:t>💡 Tips Praktis: Gunakan MainAxisAlignment.spaceBetween untuk memisahkan judul di kiri dan aksi di kanan!</a:t>
             </a:r>
           </a:p>
         </p:txBody>
@@ -5464,7 +5464,7 @@
             <a:avLst/>
           </a:prstGeom>
           <a:solidFill>
-            <a:srgbClr val="FFE600"/>
+            <a:srgbClr val="C084FC"/>
           </a:solidFill>
           <a:ln w="31750">
             <a:solidFill>
@@ -5525,7 +5525,7 @@
               </a:defRPr>
             </a:pPr>
             <a:r>
-              <a:t>row_column_demo.dart  |  CONTOH KODE BERSIH</a:t>
+              <a:t>row_column_demo.dart  |  KODE IMPLEMENTASI</a:t>
             </a:r>
           </a:p>
         </p:txBody>
@@ -5553,7 +5553,7 @@
           <a:lstStyle/>
           <a:p>
             <a:pPr>
-              <a:defRPr sz="919">
+              <a:defRPr sz="910">
                 <a:solidFill>
                   <a:srgbClr val="F5F5F5"/>
                 </a:solidFill>
@@ -6081,15 +6081,15 @@
               </a:defRPr>
             </a:pPr>
             <a:r>
-              <a:t>KONSEP &amp; CARA KERJA</a:t>
+              <a:t>KONSEP &amp; ALUR KERJA</a:t>
             </a:r>
           </a:p>
           <a:p>
             <a:pPr>
               <a:spcAft>
-                <a:spcPts val="600"/>
+                <a:spcPts val="500"/>
               </a:spcAft>
-              <a:defRPr sz="1100">
+              <a:defRPr sz="1060">
                 <a:solidFill>
                   <a:srgbClr val="141414"/>
                 </a:solidFill>
@@ -6103,9 +6103,9 @@
           <a:p>
             <a:pPr>
               <a:spcAft>
-                <a:spcPts val="600"/>
+                <a:spcPts val="500"/>
               </a:spcAft>
-              <a:defRPr sz="1100">
+              <a:defRPr sz="1060">
                 <a:solidFill>
                   <a:srgbClr val="141414"/>
                 </a:solidFill>
@@ -6119,9 +6119,9 @@
           <a:p>
             <a:pPr>
               <a:spcAft>
-                <a:spcPts val="600"/>
+                <a:spcPts val="500"/>
               </a:spcAft>
-              <a:defRPr sz="1100">
+              <a:defRPr sz="1060">
                 <a:solidFill>
                   <a:srgbClr val="141414"/>
                 </a:solidFill>
@@ -6134,7 +6134,7 @@
           </a:p>
           <a:p>
             <a:pPr>
-              <a:defRPr sz="1050" b="1">
+              <a:defRPr sz="1019" b="1">
                 <a:solidFill>
                   <a:srgbClr val="000000"/>
                 </a:solidFill>
@@ -6142,7 +6142,7 @@
               </a:defRPr>
             </a:pPr>
             <a:r>
-              <a:t>💡 Tips Praktik: Gunakan Spacer() saat Anda butuh tombol 'Lihat Semua' menempel tepat di pojok kanan layar!</a:t>
+              <a:t>💡 Tips Praktis: Gunakan Spacer() saat Anda butuh tombol 'Lihat Semua' menempel tepat di pojok kanan layar!</a:t>
             </a:r>
           </a:p>
         </p:txBody>
@@ -6250,7 +6250,7 @@
             <a:avLst/>
           </a:prstGeom>
           <a:solidFill>
-            <a:srgbClr val="FFE600"/>
+            <a:srgbClr val="4ADE80"/>
           </a:solidFill>
           <a:ln w="31750">
             <a:solidFill>
@@ -6311,7 +6311,7 @@
               </a:defRPr>
             </a:pPr>
             <a:r>
-              <a:t>spasi_demo.dart  |  CONTOH KODE BERSIH</a:t>
+              <a:t>spasi_demo.dart  |  KODE IMPLEMENTASI</a:t>
             </a:r>
           </a:p>
         </p:txBody>
@@ -6339,7 +6339,7 @@
           <a:lstStyle/>
           <a:p>
             <a:pPr>
-              <a:defRPr sz="919">
+              <a:defRPr sz="910">
                 <a:solidFill>
                   <a:srgbClr val="F5F5F5"/>
                 </a:solidFill>
@@ -6863,15 +6863,15 @@
               </a:defRPr>
             </a:pPr>
             <a:r>
-              <a:t>KONSEP &amp; CARA KERJA</a:t>
+              <a:t>KONSEP &amp; ALUR KERJA</a:t>
             </a:r>
           </a:p>
           <a:p>
             <a:pPr>
               <a:spcAft>
-                <a:spcPts val="600"/>
+                <a:spcPts val="500"/>
               </a:spcAft>
-              <a:defRPr sz="1100">
+              <a:defRPr sz="1060">
                 <a:solidFill>
                   <a:srgbClr val="141414"/>
                 </a:solidFill>
@@ -6885,9 +6885,9 @@
           <a:p>
             <a:pPr>
               <a:spcAft>
-                <a:spcPts val="600"/>
+                <a:spcPts val="500"/>
               </a:spcAft>
-              <a:defRPr sz="1100">
+              <a:defRPr sz="1060">
                 <a:solidFill>
                   <a:srgbClr val="141414"/>
                 </a:solidFill>
@@ -6901,9 +6901,9 @@
           <a:p>
             <a:pPr>
               <a:spcAft>
-                <a:spcPts val="600"/>
+                <a:spcPts val="500"/>
               </a:spcAft>
-              <a:defRPr sz="1100">
+              <a:defRPr sz="1060">
                 <a:solidFill>
                   <a:srgbClr val="141414"/>
                 </a:solidFill>
@@ -6917,9 +6917,9 @@
           <a:p>
             <a:pPr>
               <a:spcAft>
-                <a:spcPts val="600"/>
+                <a:spcPts val="500"/>
               </a:spcAft>
-              <a:defRPr sz="1100">
+              <a:defRPr sz="1060">
                 <a:solidFill>
                   <a:srgbClr val="141414"/>
                 </a:solidFill>
@@ -6932,7 +6932,7 @@
           </a:p>
           <a:p>
             <a:pPr>
-              <a:defRPr sz="1050" b="1">
+              <a:defRPr sz="1019" b="1">
                 <a:solidFill>
                   <a:srgbClr val="000000"/>
                 </a:solidFill>
@@ -6940,7 +6940,7 @@
               </a:defRPr>
             </a:pPr>
             <a:r>
-              <a:t>💡 Tips Praktik: Gunakan Expanded jika Anda ingin tombol atau kartu memenuhi seluruh lebar yang tersisa!</a:t>
+              <a:t>💡 Tips Praktis: Gunakan Expanded jika Anda ingin tombol atau kartu memenuhi seluruh lebar yang tersisa!</a:t>
             </a:r>
           </a:p>
         </p:txBody>
@@ -7109,7 +7109,7 @@
               </a:defRPr>
             </a:pPr>
             <a:r>
-              <a:t>flexible_vs_expanded.dart  |  CONTOH KODE BERSIH</a:t>
+              <a:t>flexible_vs_expanded.dart  |  KODE IMPLEMENTASI</a:t>
             </a:r>
           </a:p>
         </p:txBody>
@@ -7137,7 +7137,7 @@
           <a:lstStyle/>
           <a:p>
             <a:pPr>
-              <a:defRPr sz="919">
+              <a:defRPr sz="910">
                 <a:solidFill>
                   <a:srgbClr val="F5F5F5"/>
                 </a:solidFill>
@@ -7677,15 +7677,15 @@
               </a:defRPr>
             </a:pPr>
             <a:r>
-              <a:t>KONSEP &amp; CARA KERJA</a:t>
+              <a:t>KONSEP &amp; ALUR KERJA</a:t>
             </a:r>
           </a:p>
           <a:p>
             <a:pPr>
               <a:spcAft>
-                <a:spcPts val="600"/>
+                <a:spcPts val="500"/>
               </a:spcAft>
-              <a:defRPr sz="1100">
+              <a:defRPr sz="1060">
                 <a:solidFill>
                   <a:srgbClr val="141414"/>
                 </a:solidFill>
@@ -7699,9 +7699,9 @@
           <a:p>
             <a:pPr>
               <a:spcAft>
-                <a:spcPts val="600"/>
+                <a:spcPts val="500"/>
               </a:spcAft>
-              <a:defRPr sz="1100">
+              <a:defRPr sz="1060">
                 <a:solidFill>
                   <a:srgbClr val="141414"/>
                 </a:solidFill>
@@ -7715,9 +7715,9 @@
           <a:p>
             <a:pPr>
               <a:spcAft>
-                <a:spcPts val="600"/>
+                <a:spcPts val="500"/>
               </a:spcAft>
-              <a:defRPr sz="1100">
+              <a:defRPr sz="1060">
                 <a:solidFill>
                   <a:srgbClr val="141414"/>
                 </a:solidFill>
@@ -7730,7 +7730,7 @@
           </a:p>
           <a:p>
             <a:pPr>
-              <a:defRPr sz="1050" b="1">
+              <a:defRPr sz="1019" b="1">
                 <a:solidFill>
                   <a:srgbClr val="000000"/>
                 </a:solidFill>
@@ -7738,7 +7738,7 @@
               </a:defRPr>
             </a:pPr>
             <a:r>
-              <a:t>💡 Tips Praktik: Sangat ideal untuk membuat badge diskon toko online atau avatar dengan lampu hijau status online!</a:t>
+              <a:t>💡 Tips Praktis: Sangat ideal untuk membuat badge diskon toko online atau avatar dengan lampu hijau status online!</a:t>
             </a:r>
           </a:p>
         </p:txBody>
@@ -7846,7 +7846,7 @@
             <a:avLst/>
           </a:prstGeom>
           <a:solidFill>
-            <a:srgbClr val="FFE600"/>
+            <a:srgbClr val="38BDF8"/>
           </a:solidFill>
           <a:ln w="31750">
             <a:solidFill>
@@ -7907,7 +7907,7 @@
               </a:defRPr>
             </a:pPr>
             <a:r>
-              <a:t>stack_positioned_demo.dart  |  CONTOH KODE BERSIH</a:t>
+              <a:t>stack_positioned_demo.dart  |  KODE IMPLEMENTASI</a:t>
             </a:r>
           </a:p>
         </p:txBody>
@@ -7935,7 +7935,7 @@
           <a:lstStyle/>
           <a:p>
             <a:pPr>
-              <a:defRPr sz="919">
+              <a:defRPr sz="910">
                 <a:solidFill>
                   <a:srgbClr val="F5F5F5"/>
                 </a:solidFill>
@@ -8487,15 +8487,15 @@
               </a:defRPr>
             </a:pPr>
             <a:r>
-              <a:t>KONSEP &amp; CARA KERJA</a:t>
+              <a:t>KONSEP &amp; ALUR KERJA</a:t>
             </a:r>
           </a:p>
           <a:p>
             <a:pPr>
               <a:spcAft>
-                <a:spcPts val="600"/>
+                <a:spcPts val="500"/>
               </a:spcAft>
-              <a:defRPr sz="1100">
+              <a:defRPr sz="1060">
                 <a:solidFill>
                   <a:srgbClr val="141414"/>
                 </a:solidFill>
@@ -8509,9 +8509,9 @@
           <a:p>
             <a:pPr>
               <a:spcAft>
-                <a:spcPts val="600"/>
+                <a:spcPts val="500"/>
               </a:spcAft>
-              <a:defRPr sz="1100">
+              <a:defRPr sz="1060">
                 <a:solidFill>
                   <a:srgbClr val="141414"/>
                 </a:solidFill>
@@ -8525,9 +8525,9 @@
           <a:p>
             <a:pPr>
               <a:spcAft>
-                <a:spcPts val="600"/>
+                <a:spcPts val="500"/>
               </a:spcAft>
-              <a:defRPr sz="1100">
+              <a:defRPr sz="1060">
                 <a:solidFill>
                   <a:srgbClr val="141414"/>
                 </a:solidFill>
@@ -8541,9 +8541,9 @@
           <a:p>
             <a:pPr>
               <a:spcAft>
-                <a:spcPts val="600"/>
+                <a:spcPts val="500"/>
               </a:spcAft>
-              <a:defRPr sz="1100">
+              <a:defRPr sz="1060">
                 <a:solidFill>
                   <a:srgbClr val="141414"/>
                 </a:solidFill>
@@ -8556,7 +8556,7 @@
           </a:p>
           <a:p>
             <a:pPr>
-              <a:defRPr sz="1050" b="1">
+              <a:defRPr sz="1019" b="1">
                 <a:solidFill>
                   <a:srgbClr val="000000"/>
                 </a:solidFill>
@@ -8564,7 +8564,7 @@
               </a:defRPr>
             </a:pPr>
             <a:r>
-              <a:t>💡 Tips Praktik: Gunakan Wrap saat membuat tag topik, hashtag, atau filter kategori yang jumlahnya tidak pasti!</a:t>
+              <a:t>💡 Tips Praktis: Gunakan Wrap saat membuat tag topik, hashtag, atau filter kategori yang jumlahnya tidak pasti!</a:t>
             </a:r>
           </a:p>
         </p:txBody>
@@ -8672,7 +8672,7 @@
             <a:avLst/>
           </a:prstGeom>
           <a:solidFill>
-            <a:srgbClr val="FFE600"/>
+            <a:srgbClr val="FB7185"/>
           </a:solidFill>
           <a:ln w="31750">
             <a:solidFill>
@@ -8733,7 +8733,7 @@
               </a:defRPr>
             </a:pPr>
             <a:r>
-              <a:t>wrap_chip_demo.dart  |  CONTOH KODE BERSIH</a:t>
+              <a:t>wrap_chip_demo.dart  |  KODE IMPLEMENTASI</a:t>
             </a:r>
           </a:p>
         </p:txBody>
@@ -8761,7 +8761,7 @@
           <a:lstStyle/>
           <a:p>
             <a:pPr>
-              <a:defRPr sz="919">
+              <a:defRPr sz="910">
                 <a:solidFill>
                   <a:srgbClr val="F5F5F5"/>
                 </a:solidFill>
@@ -9293,15 +9293,15 @@
               </a:defRPr>
             </a:pPr>
             <a:r>
-              <a:t>KONSEP &amp; CARA KERJA</a:t>
+              <a:t>KONSEP &amp; ALUR KERJA</a:t>
             </a:r>
           </a:p>
           <a:p>
             <a:pPr>
               <a:spcAft>
-                <a:spcPts val="600"/>
+                <a:spcPts val="500"/>
               </a:spcAft>
-              <a:defRPr sz="1100">
+              <a:defRPr sz="1060">
                 <a:solidFill>
                   <a:srgbClr val="141414"/>
                 </a:solidFill>
@@ -9315,9 +9315,9 @@
           <a:p>
             <a:pPr>
               <a:spcAft>
-                <a:spcPts val="600"/>
+                <a:spcPts val="500"/>
               </a:spcAft>
-              <a:defRPr sz="1100">
+              <a:defRPr sz="1060">
                 <a:solidFill>
                   <a:srgbClr val="141414"/>
                 </a:solidFill>
@@ -9331,9 +9331,9 @@
           <a:p>
             <a:pPr>
               <a:spcAft>
-                <a:spcPts val="600"/>
+                <a:spcPts val="500"/>
               </a:spcAft>
-              <a:defRPr sz="1100">
+              <a:defRPr sz="1060">
                 <a:solidFill>
                   <a:srgbClr val="141414"/>
                 </a:solidFill>
@@ -9346,7 +9346,7 @@
           </a:p>
           <a:p>
             <a:pPr>
-              <a:defRPr sz="1050" b="1">
+              <a:defRPr sz="1019" b="1">
                 <a:solidFill>
                   <a:srgbClr val="000000"/>
                 </a:solidFill>
@@ -9354,7 +9354,7 @@
               </a:defRPr>
             </a:pPr>
             <a:r>
-              <a:t>💡 Tips Praktik: Selalu bungkus halaman formulir input dengan SingleChildScrollView!</a:t>
+              <a:t>💡 Tips Praktis: Selalu bungkus halaman formulir input dengan SingleChildScrollView!</a:t>
             </a:r>
           </a:p>
         </p:txBody>
@@ -9523,7 +9523,7 @@
               </a:defRPr>
             </a:pPr>
             <a:r>
-              <a:t>scrollview_form.dart  |  CONTOH KODE BERSIH</a:t>
+              <a:t>scrollview_form.dart  |  KODE IMPLEMENTASI</a:t>
             </a:r>
           </a:p>
         </p:txBody>
@@ -9551,7 +9551,7 @@
           <a:lstStyle/>
           <a:p>
             <a:pPr>
-              <a:defRPr sz="919">
+              <a:defRPr sz="910">
                 <a:solidFill>
                   <a:srgbClr val="F5F5F5"/>
                 </a:solidFill>
@@ -10124,15 +10124,15 @@
               </a:defRPr>
             </a:pPr>
             <a:r>
-              <a:t>KONSEP &amp; CARA KERJA</a:t>
+              <a:t>KONSEP &amp; ALUR KERJA</a:t>
             </a:r>
           </a:p>
           <a:p>
             <a:pPr>
               <a:spcAft>
-                <a:spcPts val="600"/>
+                <a:spcPts val="500"/>
               </a:spcAft>
-              <a:defRPr sz="1100">
+              <a:defRPr sz="1060">
                 <a:solidFill>
                   <a:srgbClr val="141414"/>
                 </a:solidFill>
@@ -10146,9 +10146,9 @@
           <a:p>
             <a:pPr>
               <a:spcAft>
-                <a:spcPts val="600"/>
+                <a:spcPts val="500"/>
               </a:spcAft>
-              <a:defRPr sz="1100">
+              <a:defRPr sz="1060">
                 <a:solidFill>
                   <a:srgbClr val="141414"/>
                 </a:solidFill>
@@ -10162,9 +10162,9 @@
           <a:p>
             <a:pPr>
               <a:spcAft>
-                <a:spcPts val="600"/>
+                <a:spcPts val="500"/>
               </a:spcAft>
-              <a:defRPr sz="1100">
+              <a:defRPr sz="1060">
                 <a:solidFill>
                   <a:srgbClr val="141414"/>
                 </a:solidFill>
@@ -10177,7 +10177,7 @@
           </a:p>
           <a:p>
             <a:pPr>
-              <a:defRPr sz="1050" b="1">
+              <a:defRPr sz="1019" b="1">
                 <a:solidFill>
                   <a:srgbClr val="000000"/>
                 </a:solidFill>
@@ -10185,7 +10185,7 @@
               </a:defRPr>
             </a:pPr>
             <a:r>
-              <a:t>💡 Tips Praktik: Gunakan ListTile di dalam ListView.builder untuk membuat baris daftar berstandar industri!</a:t>
+              <a:t>💡 Tips Praktis: Gunakan ListTile di dalam ListView.builder untuk membuat baris daftar berstandar industri!</a:t>
             </a:r>
           </a:p>
         </p:txBody>
@@ -10293,7 +10293,7 @@
             <a:avLst/>
           </a:prstGeom>
           <a:solidFill>
-            <a:srgbClr val="FFE600"/>
+            <a:srgbClr val="4ADE80"/>
           </a:solidFill>
           <a:ln w="31750">
             <a:solidFill>
@@ -10354,7 +10354,7 @@
               </a:defRPr>
             </a:pPr>
             <a:r>
-              <a:t>listview_builder_demo.dart  |  CONTOH KODE BERSIH</a:t>
+              <a:t>listview_builder_demo.dart  |  KODE IMPLEMENTASI</a:t>
             </a:r>
           </a:p>
         </p:txBody>
@@ -10382,7 +10382,7 @@
           <a:lstStyle/>
           <a:p>
             <a:pPr>
-              <a:defRPr sz="919">
+              <a:defRPr sz="910">
                 <a:solidFill>
                   <a:srgbClr val="F5F5F5"/>
                 </a:solidFill>
@@ -10918,15 +10918,15 @@
               </a:defRPr>
             </a:pPr>
             <a:r>
-              <a:t>KONSEP &amp; CARA KERJA</a:t>
+              <a:t>KONSEP &amp; ALUR KERJA</a:t>
             </a:r>
           </a:p>
           <a:p>
             <a:pPr>
               <a:spcAft>
-                <a:spcPts val="600"/>
+                <a:spcPts val="500"/>
               </a:spcAft>
-              <a:defRPr sz="1100">
+              <a:defRPr sz="1060">
                 <a:solidFill>
                   <a:srgbClr val="141414"/>
                 </a:solidFill>
@@ -10940,9 +10940,9 @@
           <a:p>
             <a:pPr>
               <a:spcAft>
-                <a:spcPts val="600"/>
+                <a:spcPts val="500"/>
               </a:spcAft>
-              <a:defRPr sz="1100">
+              <a:defRPr sz="1060">
                 <a:solidFill>
                   <a:srgbClr val="141414"/>
                 </a:solidFill>
@@ -10956,9 +10956,9 @@
           <a:p>
             <a:pPr>
               <a:spcAft>
-                <a:spcPts val="600"/>
+                <a:spcPts val="500"/>
               </a:spcAft>
-              <a:defRPr sz="1100">
+              <a:defRPr sz="1060">
                 <a:solidFill>
                   <a:srgbClr val="141414"/>
                 </a:solidFill>
@@ -10972,9 +10972,9 @@
           <a:p>
             <a:pPr>
               <a:spcAft>
-                <a:spcPts val="600"/>
+                <a:spcPts val="500"/>
               </a:spcAft>
-              <a:defRPr sz="1100">
+              <a:defRPr sz="1060">
                 <a:solidFill>
                   <a:srgbClr val="141414"/>
                 </a:solidFill>
@@ -10988,9 +10988,9 @@
           <a:p>
             <a:pPr>
               <a:spcAft>
-                <a:spcPts val="600"/>
+                <a:spcPts val="500"/>
               </a:spcAft>
-              <a:defRPr sz="1100">
+              <a:defRPr sz="1060">
                 <a:solidFill>
                   <a:srgbClr val="141414"/>
                 </a:solidFill>
@@ -11003,7 +11003,7 @@
           </a:p>
           <a:p>
             <a:pPr>
-              <a:defRPr sz="1050" b="1">
+              <a:defRPr sz="1019" b="1">
                 <a:solidFill>
                   <a:srgbClr val="000000"/>
                 </a:solidFill>
@@ -11011,7 +11011,7 @@
               </a:defRPr>
             </a:pPr>
             <a:r>
-              <a:t>💡 Tips Praktik: Jangan menghitung lebar kotak secara manual dengan MediaQuery jika bisa pakai GridView!</a:t>
+              <a:t>💡 Tips Praktis: Jangan menghitung lebar kotak secara manual dengan MediaQuery jika bisa pakai GridView!</a:t>
             </a:r>
           </a:p>
         </p:txBody>
@@ -11119,7 +11119,7 @@
             <a:avLst/>
           </a:prstGeom>
           <a:solidFill>
-            <a:srgbClr val="FFE600"/>
+            <a:srgbClr val="C084FC"/>
           </a:solidFill>
           <a:ln w="31750">
             <a:solidFill>
@@ -11180,7 +11180,7 @@
               </a:defRPr>
             </a:pPr>
             <a:r>
-              <a:t>gridview_builder_demo.dart  |  CONTOH KODE BERSIH</a:t>
+              <a:t>gridview_builder_demo.dart  |  KODE IMPLEMENTASI</a:t>
             </a:r>
           </a:p>
         </p:txBody>
@@ -11208,7 +11208,7 @@
           <a:lstStyle/>
           <a:p>
             <a:pPr>
-              <a:defRPr sz="919">
+              <a:defRPr sz="910">
                 <a:solidFill>
                   <a:srgbClr val="F5F5F5"/>
                 </a:solidFill>
@@ -11756,15 +11756,15 @@
               </a:defRPr>
             </a:pPr>
             <a:r>
-              <a:t>KONSEP &amp; CARA KERJA</a:t>
+              <a:t>KONSEP &amp; ALUR KERJA</a:t>
             </a:r>
           </a:p>
           <a:p>
             <a:pPr>
               <a:spcAft>
-                <a:spcPts val="600"/>
+                <a:spcPts val="500"/>
               </a:spcAft>
-              <a:defRPr sz="1100">
+              <a:defRPr sz="1060">
                 <a:solidFill>
                   <a:srgbClr val="141414"/>
                 </a:solidFill>
@@ -11778,9 +11778,9 @@
           <a:p>
             <a:pPr>
               <a:spcAft>
-                <a:spcPts val="600"/>
+                <a:spcPts val="500"/>
               </a:spcAft>
-              <a:defRPr sz="1100">
+              <a:defRPr sz="1060">
                 <a:solidFill>
                   <a:srgbClr val="141414"/>
                 </a:solidFill>
@@ -11794,9 +11794,9 @@
           <a:p>
             <a:pPr>
               <a:spcAft>
-                <a:spcPts val="600"/>
+                <a:spcPts val="500"/>
               </a:spcAft>
-              <a:defRPr sz="1100">
+              <a:defRPr sz="1060">
                 <a:solidFill>
                   <a:srgbClr val="141414"/>
                 </a:solidFill>
@@ -11809,7 +11809,7 @@
           </a:p>
           <a:p>
             <a:pPr>
-              <a:defRPr sz="1050" b="1">
+              <a:defRPr sz="1019" b="1">
                 <a:solidFill>
                   <a:srgbClr val="000000"/>
                 </a:solidFill>
@@ -11817,7 +11817,7 @@
               </a:defRPr>
             </a:pPr>
             <a:r>
-              <a:t>💡 Tips Praktik: Gunakan Chrome saat mendesain tampilan awal agar laptop tidak panas dan baterai awet!</a:t>
+              <a:t>💡 Tips Praktis: Gunakan Chrome saat mendesain tampilan awal agar laptop tidak panas dan baterai awet!</a:t>
             </a:r>
           </a:p>
         </p:txBody>
@@ -11925,7 +11925,7 @@
             <a:avLst/>
           </a:prstGeom>
           <a:solidFill>
-            <a:srgbClr val="FFE600"/>
+            <a:srgbClr val="4ADE80"/>
           </a:solidFill>
           <a:ln w="31750">
             <a:solidFill>
@@ -11986,7 +11986,7 @@
               </a:defRPr>
             </a:pPr>
             <a:r>
-              <a:t>terminal_workflow.sh  |  CONTOH KODE BERSIH</a:t>
+              <a:t>terminal_workflow.sh  |  KODE IMPLEMENTASI</a:t>
             </a:r>
           </a:p>
         </p:txBody>
@@ -12014,7 +12014,7 @@
           <a:lstStyle/>
           <a:p>
             <a:pPr>
-              <a:defRPr sz="919">
+              <a:defRPr sz="910">
                 <a:solidFill>
                   <a:srgbClr val="F5F5F5"/>
                 </a:solidFill>
@@ -12541,15 +12541,15 @@
               </a:defRPr>
             </a:pPr>
             <a:r>
-              <a:t>KONSEP &amp; CARA KERJA</a:t>
+              <a:t>KONSEP &amp; ALUR KERJA</a:t>
             </a:r>
           </a:p>
           <a:p>
             <a:pPr>
               <a:spcAft>
-                <a:spcPts val="600"/>
+                <a:spcPts val="500"/>
               </a:spcAft>
-              <a:defRPr sz="1100">
+              <a:defRPr sz="1060">
                 <a:solidFill>
                   <a:srgbClr val="141414"/>
                 </a:solidFill>
@@ -12563,9 +12563,9 @@
           <a:p>
             <a:pPr>
               <a:spcAft>
-                <a:spcPts val="600"/>
+                <a:spcPts val="500"/>
               </a:spcAft>
-              <a:defRPr sz="1100">
+              <a:defRPr sz="1060">
                 <a:solidFill>
                   <a:srgbClr val="141414"/>
                 </a:solidFill>
@@ -12579,9 +12579,9 @@
           <a:p>
             <a:pPr>
               <a:spcAft>
-                <a:spcPts val="600"/>
+                <a:spcPts val="500"/>
               </a:spcAft>
-              <a:defRPr sz="1100">
+              <a:defRPr sz="1060">
                 <a:solidFill>
                   <a:srgbClr val="141414"/>
                 </a:solidFill>
@@ -12594,7 +12594,7 @@
           </a:p>
           <a:p>
             <a:pPr>
-              <a:defRPr sz="1050" b="1">
+              <a:defRPr sz="1019" b="1">
                 <a:solidFill>
                   <a:srgbClr val="000000"/>
                 </a:solidFill>
@@ -12602,7 +12602,7 @@
               </a:defRPr>
             </a:pPr>
             <a:r>
-              <a:t>💡 Tips Praktik: Di dalam Row, jangan biarkan Text berdiri sendiri tanpa perlindungan Expanded jika isinya dinamis!</a:t>
+              <a:t>💡 Tips Praktis: Di dalam Row, jangan biarkan Text berdiri sendiri tanpa perlindungan Expanded jika isinya dinamis!</a:t>
             </a:r>
           </a:p>
         </p:txBody>
@@ -12710,7 +12710,7 @@
             <a:avLst/>
           </a:prstGeom>
           <a:solidFill>
-            <a:srgbClr val="FFE600"/>
+            <a:srgbClr val="FB7185"/>
           </a:solidFill>
           <a:ln w="31750">
             <a:solidFill>
@@ -12771,7 +12771,7 @@
               </a:defRPr>
             </a:pPr>
             <a:r>
-              <a:t>solusi_overflow.dart  |  CONTOH KODE BERSIH</a:t>
+              <a:t>solusi_overflow.dart  |  KODE IMPLEMENTASI</a:t>
             </a:r>
           </a:p>
         </p:txBody>
@@ -12799,7 +12799,7 @@
           <a:lstStyle/>
           <a:p>
             <a:pPr>
-              <a:defRPr sz="919">
+              <a:defRPr sz="910">
                 <a:solidFill>
                   <a:srgbClr val="F5F5F5"/>
                 </a:solidFill>
@@ -13343,15 +13343,15 @@
               </a:defRPr>
             </a:pPr>
             <a:r>
-              <a:t>KONSEP &amp; CARA KERJA</a:t>
+              <a:t>KONSEP &amp; ALUR KERJA</a:t>
             </a:r>
           </a:p>
           <a:p>
             <a:pPr>
               <a:spcAft>
-                <a:spcPts val="600"/>
+                <a:spcPts val="500"/>
               </a:spcAft>
-              <a:defRPr sz="1100">
+              <a:defRPr sz="1060">
                 <a:solidFill>
                   <a:srgbClr val="141414"/>
                 </a:solidFill>
@@ -13365,9 +13365,9 @@
           <a:p>
             <a:pPr>
               <a:spcAft>
-                <a:spcPts val="600"/>
+                <a:spcPts val="500"/>
               </a:spcAft>
-              <a:defRPr sz="1100">
+              <a:defRPr sz="1060">
                 <a:solidFill>
                   <a:srgbClr val="141414"/>
                 </a:solidFill>
@@ -13381,9 +13381,9 @@
           <a:p>
             <a:pPr>
               <a:spcAft>
-                <a:spcPts val="600"/>
+                <a:spcPts val="500"/>
               </a:spcAft>
-              <a:defRPr sz="1100">
+              <a:defRPr sz="1060">
                 <a:solidFill>
                   <a:srgbClr val="141414"/>
                 </a:solidFill>
@@ -13397,9 +13397,9 @@
           <a:p>
             <a:pPr>
               <a:spcAft>
-                <a:spcPts val="600"/>
+                <a:spcPts val="500"/>
               </a:spcAft>
-              <a:defRPr sz="1100">
+              <a:defRPr sz="1060">
                 <a:solidFill>
                   <a:srgbClr val="141414"/>
                 </a:solidFill>
@@ -13412,7 +13412,7 @@
           </a:p>
           <a:p>
             <a:pPr>
-              <a:defRPr sz="1050" b="1">
+              <a:defRPr sz="1019" b="1">
                 <a:solidFill>
                   <a:srgbClr val="000000"/>
                 </a:solidFill>
@@ -13420,7 +13420,7 @@
               </a:defRPr>
             </a:pPr>
             <a:r>
-              <a:t>💡 Tips Praktik: Ingat rumusnya: ListView di dalam Column WAJIB dibungkus Expanded!</a:t>
+              <a:t>💡 Tips Praktis: Ingat rumusnya: ListView di dalam Column WAJIB dibungkus Expanded!</a:t>
             </a:r>
           </a:p>
         </p:txBody>
@@ -13528,7 +13528,7 @@
             <a:avLst/>
           </a:prstGeom>
           <a:solidFill>
-            <a:srgbClr val="FFE600"/>
+            <a:srgbClr val="38BDF8"/>
           </a:solidFill>
           <a:ln w="31750">
             <a:solidFill>
@@ -13589,7 +13589,7 @@
               </a:defRPr>
             </a:pPr>
             <a:r>
-              <a:t>unbounded_height_fix.dart  |  CONTOH KODE BERSIH</a:t>
+              <a:t>unbounded_height_fix.dart  |  KODE IMPLEMENTASI</a:t>
             </a:r>
           </a:p>
         </p:txBody>
@@ -13617,7 +13617,7 @@
           <a:lstStyle/>
           <a:p>
             <a:pPr>
-              <a:defRPr sz="919">
+              <a:defRPr sz="910">
                 <a:solidFill>
                   <a:srgbClr val="F5F5F5"/>
                 </a:solidFill>
@@ -14161,15 +14161,15 @@
               </a:defRPr>
             </a:pPr>
             <a:r>
-              <a:t>KONSEP &amp; CARA KERJA</a:t>
+              <a:t>KONSEP &amp; ALUR KERJA</a:t>
             </a:r>
           </a:p>
           <a:p>
             <a:pPr>
               <a:spcAft>
-                <a:spcPts val="600"/>
+                <a:spcPts val="500"/>
               </a:spcAft>
-              <a:defRPr sz="1100">
+              <a:defRPr sz="1060">
                 <a:solidFill>
                   <a:srgbClr val="141414"/>
                 </a:solidFill>
@@ -14183,9 +14183,9 @@
           <a:p>
             <a:pPr>
               <a:spcAft>
-                <a:spcPts val="600"/>
+                <a:spcPts val="500"/>
               </a:spcAft>
-              <a:defRPr sz="1100">
+              <a:defRPr sz="1060">
                 <a:solidFill>
                   <a:srgbClr val="141414"/>
                 </a:solidFill>
@@ -14199,9 +14199,9 @@
           <a:p>
             <a:pPr>
               <a:spcAft>
-                <a:spcPts val="600"/>
+                <a:spcPts val="500"/>
               </a:spcAft>
-              <a:defRPr sz="1100">
+              <a:defRPr sz="1060">
                 <a:solidFill>
                   <a:srgbClr val="141414"/>
                 </a:solidFill>
@@ -14215,9 +14215,9 @@
           <a:p>
             <a:pPr>
               <a:spcAft>
-                <a:spcPts val="600"/>
+                <a:spcPts val="500"/>
               </a:spcAft>
-              <a:defRPr sz="1100">
+              <a:defRPr sz="1060">
                 <a:solidFill>
                   <a:srgbClr val="141414"/>
                 </a:solidFill>
@@ -14230,7 +14230,7 @@
           </a:p>
           <a:p>
             <a:pPr>
-              <a:defRPr sz="1050" b="1">
+              <a:defRPr sz="1019" b="1">
                 <a:solidFill>
                   <a:srgbClr val="000000"/>
                 </a:solidFill>
@@ -14238,7 +14238,7 @@
               </a:defRPr>
             </a:pPr>
             <a:r>
-              <a:t>💡 Tips Praktik: Pasang koma di ujung widget, lalu tekan Ctrl + S. Kode Anda langsung rapi otomatis!</a:t>
+              <a:t>💡 Tips Praktis: Pasang koma di ujung widget, lalu tekan Ctrl + S. Kode Anda langsung rapi otomatis!</a:t>
             </a:r>
           </a:p>
         </p:txBody>
@@ -14407,7 +14407,7 @@
               </a:defRPr>
             </a:pPr>
             <a:r>
-              <a:t>trailing_comma_demo.dart  |  CONTOH KODE BERSIH</a:t>
+              <a:t>trailing_comma_demo.dart  |  KODE IMPLEMENTASI</a:t>
             </a:r>
           </a:p>
         </p:txBody>
@@ -14435,7 +14435,7 @@
           <a:lstStyle/>
           <a:p>
             <a:pPr>
-              <a:defRPr sz="919">
+              <a:defRPr sz="910">
                 <a:solidFill>
                   <a:srgbClr val="F5F5F5"/>
                 </a:solidFill>
@@ -14972,15 +14972,15 @@
               </a:defRPr>
             </a:pPr>
             <a:r>
-              <a:t>KONSEP &amp; CARA KERJA</a:t>
+              <a:t>KONSEP &amp; ALUR KERJA</a:t>
             </a:r>
           </a:p>
           <a:p>
             <a:pPr>
               <a:spcAft>
-                <a:spcPts val="600"/>
+                <a:spcPts val="500"/>
               </a:spcAft>
-              <a:defRPr sz="1100">
+              <a:defRPr sz="1060">
                 <a:solidFill>
                   <a:srgbClr val="141414"/>
                 </a:solidFill>
@@ -14994,9 +14994,9 @@
           <a:p>
             <a:pPr>
               <a:spcAft>
-                <a:spcPts val="600"/>
+                <a:spcPts val="500"/>
               </a:spcAft>
-              <a:defRPr sz="1100">
+              <a:defRPr sz="1060">
                 <a:solidFill>
                   <a:srgbClr val="141414"/>
                 </a:solidFill>
@@ -15010,9 +15010,9 @@
           <a:p>
             <a:pPr>
               <a:spcAft>
-                <a:spcPts val="600"/>
+                <a:spcPts val="500"/>
               </a:spcAft>
-              <a:defRPr sz="1100">
+              <a:defRPr sz="1060">
                 <a:solidFill>
                   <a:srgbClr val="141414"/>
                 </a:solidFill>
@@ -15026,9 +15026,9 @@
           <a:p>
             <a:pPr>
               <a:spcAft>
-                <a:spcPts val="600"/>
+                <a:spcPts val="500"/>
               </a:spcAft>
-              <a:defRPr sz="1100">
+              <a:defRPr sz="1060">
                 <a:solidFill>
                   <a:srgbClr val="141414"/>
                 </a:solidFill>
@@ -15041,7 +15041,7 @@
           </a:p>
           <a:p>
             <a:pPr>
-              <a:defRPr sz="1050" b="1">
+              <a:defRPr sz="1019" b="1">
                 <a:solidFill>
                   <a:srgbClr val="000000"/>
                 </a:solidFill>
@@ -15049,7 +15049,7 @@
               </a:defRPr>
             </a:pPr>
             <a:r>
-              <a:t>💡 Tips Praktik: Gunakan 'Toggle Debug Paint' di Flutter Inspector saat mencari letak sumber overflow!</a:t>
+              <a:t>💡 Tips Praktis: Gunakan 'Toggle Debug Paint' di Flutter Inspector saat mencari letak sumber overflow!</a:t>
             </a:r>
           </a:p>
         </p:txBody>
@@ -15157,7 +15157,7 @@
             <a:avLst/>
           </a:prstGeom>
           <a:solidFill>
-            <a:srgbClr val="FFE600"/>
+            <a:srgbClr val="4ADE80"/>
           </a:solidFill>
           <a:ln w="31750">
             <a:solidFill>
@@ -15218,7 +15218,7 @@
               </a:defRPr>
             </a:pPr>
             <a:r>
-              <a:t>shortcut_refactor.dart  |  CONTOH KODE BERSIH</a:t>
+              <a:t>shortcut_refactor.dart  |  KODE IMPLEMENTASI</a:t>
             </a:r>
           </a:p>
         </p:txBody>
@@ -15246,7 +15246,7 @@
           <a:lstStyle/>
           <a:p>
             <a:pPr>
-              <a:defRPr sz="919">
+              <a:defRPr sz="910">
                 <a:solidFill>
                   <a:srgbClr val="F5F5F5"/>
                 </a:solidFill>
@@ -15835,7 +15835,7 @@
         </p:nvSpPr>
         <p:spPr>
           <a:xfrm>
-            <a:off x="1188720" y="2212848"/>
+            <a:off x="1188720" y="2194560"/>
             <a:ext cx="9784080" cy="3291840"/>
           </a:xfrm>
           <a:prstGeom prst="rect">
@@ -15851,25 +15851,41 @@
           <a:p>
             <a:pPr>
               <a:spcAft>
+                <a:spcPts val="600"/>
+              </a:spcAft>
+              <a:defRPr sz="1200" b="1">
+                <a:solidFill>
+                  <a:srgbClr val="000000"/>
+                </a:solidFill>
+                <a:latin typeface="Segoe UI"/>
+              </a:defRPr>
+            </a:pPr>
+            <a:r>
+              <a:t>LANGKAH KERJA &amp; SPESIFIKASI TUGAS:</a:t>
+            </a:r>
+          </a:p>
+          <a:p>
+            <a:pPr>
+              <a:spcAft>
                 <a:spcPts val="400"/>
               </a:spcAft>
-              <a:defRPr sz="1350" b="1">
-                <a:solidFill>
-                  <a:srgbClr val="000000"/>
-                </a:solidFill>
-                <a:latin typeface="Segoe UI"/>
-              </a:defRPr>
-            </a:pPr>
-            <a:r>
-              <a:t>Checklist Langkah Praktikum di Lab:</a:t>
+              <a:defRPr sz="1040">
+                <a:solidFill>
+                  <a:srgbClr val="1E1E1E"/>
+                </a:solidFill>
+                <a:latin typeface="Segoe UI"/>
+              </a:defRPr>
+            </a:pPr>
+            <a:r>
+              <a:t>✔  Buka proyek Flutter di VS Code dan jalankan target Google Chrome ('flutter run -d chrome') atau smartphone via USB.</a:t>
             </a:r>
           </a:p>
           <a:p>
             <a:pPr>
               <a:spcAft>
-                <a:spcPts val="200"/>
+                <a:spcPts val="400"/>
               </a:spcAft>
-              <a:defRPr sz="1050">
+              <a:defRPr sz="1040">
                 <a:solidFill>
                   <a:srgbClr val="1E1E1E"/>
                 </a:solidFill>
@@ -15877,15 +15893,15 @@
               </a:defRPr>
             </a:pPr>
             <a:r>
-              <a:t>  [  ]   Buka proyek Flutter di VS Code dan jalankan target Google Chrome ('flutter run -d chrome') atau smartphone via USB.</a:t>
+              <a:t>✔  Gunakan 'SafeArea' pada body Scaffold agar antarmuka tidak terpotong lubang kamera ponsel.</a:t>
             </a:r>
           </a:p>
           <a:p>
             <a:pPr>
               <a:spcAft>
-                <a:spcPts val="200"/>
+                <a:spcPts val="400"/>
               </a:spcAft>
-              <a:defRPr sz="1050">
+              <a:defRPr sz="1040">
                 <a:solidFill>
                   <a:srgbClr val="1E1E1E"/>
                 </a:solidFill>
@@ -15893,15 +15909,15 @@
               </a:defRPr>
             </a:pPr>
             <a:r>
-              <a:t>  [  ]   Gunakan 'SafeArea' pada body Scaffold agar antarmuka tidak terpotong lubang kamera ponsel.</a:t>
+              <a:t>✔  Buat Kartu KTM Digital menggunakan Container berlatar warna kuning (#FFE600), border hitam 2.5px siku-siku, dan avatar foto.</a:t>
             </a:r>
           </a:p>
           <a:p>
             <a:pPr>
               <a:spcAft>
-                <a:spcPts val="200"/>
+                <a:spcPts val="400"/>
               </a:spcAft>
-              <a:defRPr sz="1050">
+              <a:defRPr sz="1040">
                 <a:solidFill>
                   <a:srgbClr val="1E1E1E"/>
                 </a:solidFill>
@@ -15909,15 +15925,15 @@
               </a:defRPr>
             </a:pPr>
             <a:r>
-              <a:t>  [  ]   Buat Kartu KTM Digital menggunakan Container berlatar warna kuning (#FFE600), border hitam 2.5px siku-siku, dan avatar foto.</a:t>
+              <a:t>✔  Gunakan 'Stack &amp; Positioned' untuk menaruh badge stiker: 'AKTIF 2026' di pojok kanan atas kartu KTM.</a:t>
             </a:r>
           </a:p>
           <a:p>
             <a:pPr>
               <a:spcAft>
-                <a:spcPts val="200"/>
+                <a:spcPts val="400"/>
               </a:spcAft>
-              <a:defRPr sz="1050">
+              <a:defRPr sz="1040">
                 <a:solidFill>
                   <a:srgbClr val="1E1E1E"/>
                 </a:solidFill>
@@ -15925,15 +15941,15 @@
               </a:defRPr>
             </a:pPr>
             <a:r>
-              <a:t>  [  ]   Gunakan 'Stack &amp; Positioned' untuk menaruh badge stiker: 'AKTIF 2026' di pojok kanan atas kartu KTM.</a:t>
+              <a:t>✔  Bungkus nama mahasiswa dengan 'Expanded' + 'TextOverflow.ellipsis' agar nama panjang tidak memicu garis belang overflow!</a:t>
             </a:r>
           </a:p>
           <a:p>
             <a:pPr>
               <a:spcAft>
-                <a:spcPts val="200"/>
+                <a:spcPts val="400"/>
               </a:spcAft>
-              <a:defRPr sz="1050">
+              <a:defRPr sz="1040">
                 <a:solidFill>
                   <a:srgbClr val="1E1E1E"/>
                 </a:solidFill>
@@ -15941,15 +15957,15 @@
               </a:defRPr>
             </a:pPr>
             <a:r>
-              <a:t>  [  ]   Bungkus nama mahasiswa dengan 'Expanded' + 'TextOverflow.ellipsis' agar nama panjang tidak memicu garis belang overflow!</a:t>
+              <a:t>✔  Gunakan 'Wrap' untuk menampilkan daftar 3 keahlian minat (Skill Chips) di bawah nama mahasiswa.</a:t>
             </a:r>
           </a:p>
           <a:p>
             <a:pPr>
               <a:spcAft>
-                <a:spcPts val="200"/>
+                <a:spcPts val="400"/>
               </a:spcAft>
-              <a:defRPr sz="1050">
+              <a:defRPr sz="1040">
                 <a:solidFill>
                   <a:srgbClr val="1E1E1E"/>
                 </a:solidFill>
@@ -15957,15 +15973,15 @@
               </a:defRPr>
             </a:pPr>
             <a:r>
-              <a:t>  [  ]   Gunakan 'Wrap' untuk menampilkan daftar 3 keahlian minat (Skill Chips) di bawah nama mahasiswa.</a:t>
+              <a:t>✔  Di bawah KTM, gunakan 'GridView.builder' (2 kolom) untuk menampilkan 4 ubin menu: KHS, KRS, Jadwal, dan Presensi.</a:t>
             </a:r>
           </a:p>
           <a:p>
             <a:pPr>
               <a:spcAft>
-                <a:spcPts val="200"/>
+                <a:spcPts val="400"/>
               </a:spcAft>
-              <a:defRPr sz="1050">
+              <a:defRPr sz="1040">
                 <a:solidFill>
                   <a:srgbClr val="1E1E1E"/>
                 </a:solidFill>
@@ -15973,36 +15989,20 @@
               </a:defRPr>
             </a:pPr>
             <a:r>
-              <a:t>  [  ]   Di bawah KTM, gunakan 'GridView.builder' (2 kolom) untuk menampilkan 4 ubin menu: KHS, KRS, Jadwal, dan Presensi.</a:t>
-            </a:r>
-          </a:p>
-          <a:p>
-            <a:pPr>
-              <a:spcAft>
-                <a:spcPts val="200"/>
-              </a:spcAft>
-              <a:defRPr sz="1050">
-                <a:solidFill>
-                  <a:srgbClr val="1E1E1E"/>
-                </a:solidFill>
-                <a:latin typeface="Segoe UI"/>
-              </a:defRPr>
-            </a:pPr>
-            <a:r>
-              <a:t>  [  ]   Praktikkan trik 'Trailing Comma' dan shortcut 'Alt + Enter' di VS Code agar kode bersih tanpa bracket hell.</a:t>
-            </a:r>
-          </a:p>
-          <a:p>
-            <a:pPr>
-              <a:defRPr sz="1100" b="1">
-                <a:solidFill>
-                  <a:srgbClr val="00823C"/>
-                </a:solidFill>
-                <a:latin typeface="Segoe UI"/>
-              </a:defRPr>
-            </a:pPr>
-            <a:r>
-              <a:t>✔ Kriteria Keberhasilan (Tunjukkan ke Dosen/Asisten Lab): Tunjukkan kartu KTM Digital + Grid Menu di layar monitor/HP. Bebas 100% dari garis belang overflow dan rapi di bawah SafeArea!</a:t>
+              <a:t>✔  Praktikkan trik 'Trailing Comma' dan shortcut 'Alt + Enter' di VS Code agar kode bersih tanpa bracket hell.</a:t>
+            </a:r>
+          </a:p>
+          <a:p>
+            <a:pPr>
+              <a:defRPr sz="1080" b="1">
+                <a:solidFill>
+                  <a:srgbClr val="0A6428"/>
+                </a:solidFill>
+                <a:latin typeface="Segoe UI"/>
+              </a:defRPr>
+            </a:pPr>
+            <a:r>
+              <a:t>🎯 TARGET SELESAI: Tunjukkan kartu KTM Digital + Grid Menu di layar monitor/HP. Bebas 100% dari garis belang overflow dan rapi di bawah SafeArea!</a:t>
             </a:r>
           </a:p>
         </p:txBody>
@@ -16015,8 +16015,8 @@
         </p:nvSpPr>
         <p:spPr>
           <a:xfrm>
-            <a:off x="1225296" y="5669280"/>
-            <a:ext cx="9784080" cy="502920"/>
+            <a:off x="1225296" y="5632704"/>
+            <a:ext cx="9784080" cy="566928"/>
           </a:xfrm>
           <a:prstGeom prst="rect">
             <a:avLst/>
@@ -16058,14 +16058,14 @@
         </p:nvSpPr>
         <p:spPr>
           <a:xfrm>
-            <a:off x="1188720" y="5632704"/>
-            <a:ext cx="9784080" cy="502920"/>
-          </a:xfrm>
-          <a:prstGeom prst="rect">
-            <a:avLst/>
-          </a:prstGeom>
-          <a:solidFill>
-            <a:srgbClr val="4ADE80"/>
+            <a:off x="1188720" y="5596128"/>
+            <a:ext cx="9784080" cy="566928"/>
+          </a:xfrm>
+          <a:prstGeom prst="rect">
+            <a:avLst/>
+          </a:prstGeom>
+          <a:solidFill>
+            <a:srgbClr val="FFE600"/>
           </a:solidFill>
           <a:ln w="25400">
             <a:solidFill>
@@ -16103,8 +16103,8 @@
         </p:nvSpPr>
         <p:spPr>
           <a:xfrm>
-            <a:off x="1261872" y="5660136"/>
-            <a:ext cx="9637776" cy="448056"/>
+            <a:off x="1298448" y="5623560"/>
+            <a:ext cx="9564624" cy="512064"/>
           </a:xfrm>
           <a:prstGeom prst="rect">
             <a:avLst/>
@@ -16118,7 +16118,7 @@
           <a:lstStyle/>
           <a:p>
             <a:r>
-              <a:rPr sz="1000" b="1">
+              <a:rPr sz="1100" b="1">
                 <a:solidFill>
                   <a:srgbClr val="000000"/>
                 </a:solidFill>
@@ -16130,9 +16130,9 @@
           </a:p>
           <a:p>
             <a:pPr>
-              <a:defRPr sz="800">
-                <a:solidFill>
-                  <a:srgbClr val="3C3C3C"/>
+              <a:defRPr sz="830">
+                <a:solidFill>
+                  <a:srgbClr val="323232"/>
                 </a:solidFill>
                 <a:latin typeface="Segoe UI"/>
               </a:defRPr>
@@ -16486,15 +16486,15 @@
               </a:defRPr>
             </a:pPr>
             <a:r>
-              <a:t>KONSEP &amp; CARA KERJA</a:t>
+              <a:t>KONSEP &amp; ALUR KERJA</a:t>
             </a:r>
           </a:p>
           <a:p>
             <a:pPr>
               <a:spcAft>
-                <a:spcPts val="600"/>
+                <a:spcPts val="500"/>
               </a:spcAft>
-              <a:defRPr sz="1100">
+              <a:defRPr sz="1060">
                 <a:solidFill>
                   <a:srgbClr val="141414"/>
                 </a:solidFill>
@@ -16508,9 +16508,9 @@
           <a:p>
             <a:pPr>
               <a:spcAft>
-                <a:spcPts val="600"/>
+                <a:spcPts val="500"/>
               </a:spcAft>
-              <a:defRPr sz="1100">
+              <a:defRPr sz="1060">
                 <a:solidFill>
                   <a:srgbClr val="141414"/>
                 </a:solidFill>
@@ -16524,9 +16524,9 @@
           <a:p>
             <a:pPr>
               <a:spcAft>
-                <a:spcPts val="600"/>
+                <a:spcPts val="500"/>
               </a:spcAft>
-              <a:defRPr sz="1100">
+              <a:defRPr sz="1060">
                 <a:solidFill>
                   <a:srgbClr val="141414"/>
                 </a:solidFill>
@@ -16540,9 +16540,9 @@
           <a:p>
             <a:pPr>
               <a:spcAft>
-                <a:spcPts val="600"/>
+                <a:spcPts val="500"/>
               </a:spcAft>
-              <a:defRPr sz="1100">
+              <a:defRPr sz="1060">
                 <a:solidFill>
                   <a:srgbClr val="141414"/>
                 </a:solidFill>
@@ -16555,7 +16555,7 @@
           </a:p>
           <a:p>
             <a:pPr>
-              <a:defRPr sz="1050" b="1">
+              <a:defRPr sz="1019" b="1">
                 <a:solidFill>
                   <a:srgbClr val="000000"/>
                 </a:solidFill>
@@ -16563,7 +16563,7 @@
               </a:defRPr>
             </a:pPr>
             <a:r>
-              <a:t>💡 Tips Praktik: Perhatikan bagaimana Center membungkus Padding, dan Padding membungkus Tombol!</a:t>
+              <a:t>💡 Tips Praktis: Perhatikan bagaimana Center membungkus Padding, dan Padding membungkus Tombol!</a:t>
             </a:r>
           </a:p>
         </p:txBody>
@@ -16732,7 +16732,7 @@
               </a:defRPr>
             </a:pPr>
             <a:r>
-              <a:t>balok_widget.dart  |  CONTOH KODE BERSIH</a:t>
+              <a:t>balok_widget.dart  |  KODE IMPLEMENTASI</a:t>
             </a:r>
           </a:p>
         </p:txBody>
@@ -16760,7 +16760,7 @@
           <a:lstStyle/>
           <a:p>
             <a:pPr>
-              <a:defRPr sz="919">
+              <a:defRPr sz="910">
                 <a:solidFill>
                   <a:srgbClr val="F5F5F5"/>
                 </a:solidFill>
@@ -17296,15 +17296,15 @@
               </a:defRPr>
             </a:pPr>
             <a:r>
-              <a:t>KONSEP &amp; CARA KERJA</a:t>
+              <a:t>KONSEP &amp; ALUR KERJA</a:t>
             </a:r>
           </a:p>
           <a:p>
             <a:pPr>
               <a:spcAft>
-                <a:spcPts val="600"/>
+                <a:spcPts val="500"/>
               </a:spcAft>
-              <a:defRPr sz="1100">
+              <a:defRPr sz="1060">
                 <a:solidFill>
                   <a:srgbClr val="141414"/>
                 </a:solidFill>
@@ -17318,9 +17318,9 @@
           <a:p>
             <a:pPr>
               <a:spcAft>
-                <a:spcPts val="600"/>
+                <a:spcPts val="500"/>
               </a:spcAft>
-              <a:defRPr sz="1100">
+              <a:defRPr sz="1060">
                 <a:solidFill>
                   <a:srgbClr val="141414"/>
                 </a:solidFill>
@@ -17334,9 +17334,9 @@
           <a:p>
             <a:pPr>
               <a:spcAft>
-                <a:spcPts val="600"/>
+                <a:spcPts val="500"/>
               </a:spcAft>
-              <a:defRPr sz="1100">
+              <a:defRPr sz="1060">
                 <a:solidFill>
                   <a:srgbClr val="141414"/>
                 </a:solidFill>
@@ -17349,7 +17349,7 @@
           </a:p>
           <a:p>
             <a:pPr>
-              <a:defRPr sz="1050" b="1">
+              <a:defRPr sz="1019" b="1">
                 <a:solidFill>
                   <a:srgbClr val="000000"/>
                 </a:solidFill>
@@ -17357,7 +17357,7 @@
               </a:defRPr>
             </a:pPr>
             <a:r>
-              <a:t>💡 Tips Praktik: Anggap Scaffold seperti tiang tenda. Tanpa Scaffold, atap antarmuka Anda akan roboh!</a:t>
+              <a:t>💡 Tips Praktis: Anggap Scaffold seperti tiang tenda. Tanpa Scaffold, atap antarmuka Anda akan roboh!</a:t>
             </a:r>
           </a:p>
         </p:txBody>
@@ -17465,7 +17465,7 @@
             <a:avLst/>
           </a:prstGeom>
           <a:solidFill>
-            <a:srgbClr val="FFE600"/>
+            <a:srgbClr val="FB7185"/>
           </a:solidFill>
           <a:ln w="31750">
             <a:solidFill>
@@ -17526,7 +17526,7 @@
               </a:defRPr>
             </a:pPr>
             <a:r>
-              <a:t>main_scaffold.dart  |  CONTOH KODE BERSIH</a:t>
+              <a:t>main_scaffold.dart  |  KODE IMPLEMENTASI</a:t>
             </a:r>
           </a:p>
         </p:txBody>
@@ -17554,7 +17554,7 @@
           <a:lstStyle/>
           <a:p>
             <a:pPr>
-              <a:defRPr sz="919">
+              <a:defRPr sz="910">
                 <a:solidFill>
                   <a:srgbClr val="F5F5F5"/>
                 </a:solidFill>
@@ -18101,15 +18101,15 @@
               </a:defRPr>
             </a:pPr>
             <a:r>
-              <a:t>KONSEP &amp; CARA KERJA</a:t>
+              <a:t>KONSEP &amp; ALUR KERJA</a:t>
             </a:r>
           </a:p>
           <a:p>
             <a:pPr>
               <a:spcAft>
-                <a:spcPts val="600"/>
+                <a:spcPts val="500"/>
               </a:spcAft>
-              <a:defRPr sz="1100">
+              <a:defRPr sz="1060">
                 <a:solidFill>
                   <a:srgbClr val="141414"/>
                 </a:solidFill>
@@ -18123,9 +18123,9 @@
           <a:p>
             <a:pPr>
               <a:spcAft>
-                <a:spcPts val="600"/>
+                <a:spcPts val="500"/>
               </a:spcAft>
-              <a:defRPr sz="1100">
+              <a:defRPr sz="1060">
                 <a:solidFill>
                   <a:srgbClr val="141414"/>
                 </a:solidFill>
@@ -18139,9 +18139,9 @@
           <a:p>
             <a:pPr>
               <a:spcAft>
-                <a:spcPts val="600"/>
+                <a:spcPts val="500"/>
               </a:spcAft>
-              <a:defRPr sz="1100">
+              <a:defRPr sz="1060">
                 <a:solidFill>
                   <a:srgbClr val="141414"/>
                 </a:solidFill>
@@ -18155,9 +18155,9 @@
           <a:p>
             <a:pPr>
               <a:spcAft>
-                <a:spcPts val="600"/>
+                <a:spcPts val="500"/>
               </a:spcAft>
-              <a:defRPr sz="1100">
+              <a:defRPr sz="1060">
                 <a:solidFill>
                   <a:srgbClr val="141414"/>
                 </a:solidFill>
@@ -18170,7 +18170,7 @@
           </a:p>
           <a:p>
             <a:pPr>
-              <a:defRPr sz="1050" b="1">
+              <a:defRPr sz="1019" b="1">
                 <a:solidFill>
                   <a:srgbClr val="000000"/>
                 </a:solidFill>
@@ -18178,7 +18178,7 @@
               </a:defRPr>
             </a:pPr>
             <a:r>
-              <a:t>💡 Tips Praktik: Flutter hanya melukis ulang piksel yang berubah, bukan merombak seluruh layar ponsel!</a:t>
+              <a:t>💡 Tips Praktis: Flutter hanya melukis ulang piksel yang berubah, bukan merombak seluruh layar ponsel!</a:t>
             </a:r>
           </a:p>
         </p:txBody>
@@ -18286,7 +18286,7 @@
             <a:avLst/>
           </a:prstGeom>
           <a:solidFill>
-            <a:srgbClr val="FFE600"/>
+            <a:srgbClr val="38BDF8"/>
           </a:solidFill>
           <a:ln w="31750">
             <a:solidFill>
@@ -18347,7 +18347,7 @@
               </a:defRPr>
             </a:pPr>
             <a:r>
-              <a:t>arsitektur_tiga_pohon.dart  |  CONTOH KODE BERSIH</a:t>
+              <a:t>arsitektur_tiga_pohon.dart  |  KODE IMPLEMENTASI</a:t>
             </a:r>
           </a:p>
         </p:txBody>
@@ -18375,7 +18375,7 @@
           <a:lstStyle/>
           <a:p>
             <a:pPr>
-              <a:defRPr sz="919">
+              <a:defRPr sz="910">
                 <a:solidFill>
                   <a:srgbClr val="F5F5F5"/>
                 </a:solidFill>
@@ -18905,15 +18905,15 @@
               </a:defRPr>
             </a:pPr>
             <a:r>
-              <a:t>KONSEP &amp; CARA KERJA</a:t>
+              <a:t>KONSEP &amp; ALUR KERJA</a:t>
             </a:r>
           </a:p>
           <a:p>
             <a:pPr>
               <a:spcAft>
-                <a:spcPts val="600"/>
+                <a:spcPts val="500"/>
               </a:spcAft>
-              <a:defRPr sz="1100">
+              <a:defRPr sz="1060">
                 <a:solidFill>
                   <a:srgbClr val="141414"/>
                 </a:solidFill>
@@ -18927,9 +18927,9 @@
           <a:p>
             <a:pPr>
               <a:spcAft>
-                <a:spcPts val="600"/>
+                <a:spcPts val="500"/>
               </a:spcAft>
-              <a:defRPr sz="1100">
+              <a:defRPr sz="1060">
                 <a:solidFill>
                   <a:srgbClr val="141414"/>
                 </a:solidFill>
@@ -18943,9 +18943,9 @@
           <a:p>
             <a:pPr>
               <a:spcAft>
-                <a:spcPts val="600"/>
+                <a:spcPts val="500"/>
               </a:spcAft>
-              <a:defRPr sz="1100">
+              <a:defRPr sz="1060">
                 <a:solidFill>
                   <a:srgbClr val="141414"/>
                 </a:solidFill>
@@ -18959,9 +18959,9 @@
           <a:p>
             <a:pPr>
               <a:spcAft>
-                <a:spcPts val="600"/>
+                <a:spcPts val="500"/>
               </a:spcAft>
-              <a:defRPr sz="1100">
+              <a:defRPr sz="1060">
                 <a:solidFill>
                   <a:srgbClr val="141414"/>
                 </a:solidFill>
@@ -18974,7 +18974,7 @@
           </a:p>
           <a:p>
             <a:pPr>
-              <a:defRPr sz="1050" b="1">
+              <a:defRPr sz="1019" b="1">
                 <a:solidFill>
                   <a:srgbClr val="000000"/>
                 </a:solidFill>
@@ -18982,7 +18982,7 @@
               </a:defRPr>
             </a:pPr>
             <a:r>
-              <a:t>💡 Tips Praktik: Gunakan StatelessWidget secara default. Ubah ke Stateful HANYA jika datanya berubah di layar!</a:t>
+              <a:t>💡 Tips Praktis: Gunakan StatelessWidget secara default. Ubah ke Stateful HANYA jika datanya berubah di layar!</a:t>
             </a:r>
           </a:p>
         </p:txBody>
@@ -19090,7 +19090,7 @@
             <a:avLst/>
           </a:prstGeom>
           <a:solidFill>
-            <a:srgbClr val="FFE600"/>
+            <a:srgbClr val="C084FC"/>
           </a:solidFill>
           <a:ln w="31750">
             <a:solidFill>
@@ -19151,7 +19151,7 @@
               </a:defRPr>
             </a:pPr>
             <a:r>
-              <a:t>stateless_demo.dart  |  CONTOH KODE BERSIH</a:t>
+              <a:t>stateless_demo.dart  |  KODE IMPLEMENTASI</a:t>
             </a:r>
           </a:p>
         </p:txBody>
@@ -19179,7 +19179,7 @@
           <a:lstStyle/>
           <a:p>
             <a:pPr>
-              <a:defRPr sz="919">
+              <a:defRPr sz="910">
                 <a:solidFill>
                   <a:srgbClr val="F5F5F5"/>
                 </a:solidFill>
@@ -19732,15 +19732,15 @@
               </a:defRPr>
             </a:pPr>
             <a:r>
-              <a:t>KONSEP &amp; CARA KERJA</a:t>
+              <a:t>KONSEP &amp; ALUR KERJA</a:t>
             </a:r>
           </a:p>
           <a:p>
             <a:pPr>
               <a:spcAft>
-                <a:spcPts val="600"/>
+                <a:spcPts val="500"/>
               </a:spcAft>
-              <a:defRPr sz="1100">
+              <a:defRPr sz="1060">
                 <a:solidFill>
                   <a:srgbClr val="141414"/>
                 </a:solidFill>
@@ -19754,9 +19754,9 @@
           <a:p>
             <a:pPr>
               <a:spcAft>
-                <a:spcPts val="600"/>
+                <a:spcPts val="500"/>
               </a:spcAft>
-              <a:defRPr sz="1100">
+              <a:defRPr sz="1060">
                 <a:solidFill>
                   <a:srgbClr val="141414"/>
                 </a:solidFill>
@@ -19770,9 +19770,9 @@
           <a:p>
             <a:pPr>
               <a:spcAft>
-                <a:spcPts val="600"/>
+                <a:spcPts val="500"/>
               </a:spcAft>
-              <a:defRPr sz="1100">
+              <a:defRPr sz="1060">
                 <a:solidFill>
                   <a:srgbClr val="141414"/>
                 </a:solidFill>
@@ -19785,7 +19785,7 @@
           </a:p>
           <a:p>
             <a:pPr>
-              <a:defRPr sz="1050" b="1">
+              <a:defRPr sz="1019" b="1">
                 <a:solidFill>
                   <a:srgbClr val="000000"/>
                 </a:solidFill>
@@ -19793,7 +19793,7 @@
               </a:defRPr>
             </a:pPr>
             <a:r>
-              <a:t>💡 Tips Praktik: Jangan pernah memanggil request API di method build(), selalu taruh di initState()!</a:t>
+              <a:t>💡 Tips Praktis: Jangan pernah memanggil request API di method build(), selalu taruh di initState()!</a:t>
             </a:r>
           </a:p>
         </p:txBody>
@@ -19962,7 +19962,7 @@
               </a:defRPr>
             </a:pPr>
             <a:r>
-              <a:t>lifecycle_demo.dart  |  CONTOH KODE BERSIH</a:t>
+              <a:t>lifecycle_demo.dart  |  KODE IMPLEMENTASI</a:t>
             </a:r>
           </a:p>
         </p:txBody>
@@ -19990,7 +19990,7 @@
           <a:lstStyle/>
           <a:p>
             <a:pPr>
-              <a:defRPr sz="919">
+              <a:defRPr sz="910">
                 <a:solidFill>
                   <a:srgbClr val="F5F5F5"/>
                 </a:solidFill>
@@ -20549,15 +20549,15 @@
               </a:defRPr>
             </a:pPr>
             <a:r>
-              <a:t>KONSEP &amp; CARA KERJA</a:t>
+              <a:t>KONSEP &amp; ALUR KERJA</a:t>
             </a:r>
           </a:p>
           <a:p>
             <a:pPr>
               <a:spcAft>
-                <a:spcPts val="600"/>
+                <a:spcPts val="500"/>
               </a:spcAft>
-              <a:defRPr sz="1100">
+              <a:defRPr sz="1060">
                 <a:solidFill>
                   <a:srgbClr val="141414"/>
                 </a:solidFill>
@@ -20571,9 +20571,9 @@
           <a:p>
             <a:pPr>
               <a:spcAft>
-                <a:spcPts val="600"/>
+                <a:spcPts val="500"/>
               </a:spcAft>
-              <a:defRPr sz="1100">
+              <a:defRPr sz="1060">
                 <a:solidFill>
                   <a:srgbClr val="141414"/>
                 </a:solidFill>
@@ -20587,9 +20587,9 @@
           <a:p>
             <a:pPr>
               <a:spcAft>
-                <a:spcPts val="600"/>
+                <a:spcPts val="500"/>
               </a:spcAft>
-              <a:defRPr sz="1100">
+              <a:defRPr sz="1060">
                 <a:solidFill>
                   <a:srgbClr val="141414"/>
                 </a:solidFill>
@@ -20603,9 +20603,9 @@
           <a:p>
             <a:pPr>
               <a:spcAft>
-                <a:spcPts val="600"/>
+                <a:spcPts val="500"/>
               </a:spcAft>
-              <a:defRPr sz="1100">
+              <a:defRPr sz="1060">
                 <a:solidFill>
                   <a:srgbClr val="141414"/>
                 </a:solidFill>
@@ -20618,7 +20618,7 @@
           </a:p>
           <a:p>
             <a:pPr>
-              <a:defRPr sz="1050" b="1">
+              <a:defRPr sz="1019" b="1">
                 <a:solidFill>
                   <a:srgbClr val="000000"/>
                 </a:solidFill>
@@ -20626,7 +20626,7 @@
               </a:defRPr>
             </a:pPr>
             <a:r>
-              <a:t>💡 Tips Praktik: Jika sebuah tombol melebar memenuhi layar, periksa batasan yang diberikan oleh induknya!</a:t>
+              <a:t>💡 Tips Praktis: Jika sebuah tombol melebar memenuhi layar, periksa batasan yang diberikan oleh induknya!</a:t>
             </a:r>
           </a:p>
         </p:txBody>
@@ -20734,7 +20734,7 @@
             <a:avLst/>
           </a:prstGeom>
           <a:solidFill>
-            <a:srgbClr val="FFE600"/>
+            <a:srgbClr val="4ADE80"/>
           </a:solidFill>
           <a:ln w="31750">
             <a:solidFill>
@@ -20795,7 +20795,7 @@
               </a:defRPr>
             </a:pPr>
             <a:r>
-              <a:t>box_constraints.dart  |  CONTOH KODE BERSIH</a:t>
+              <a:t>box_constraints.dart  |  KODE IMPLEMENTASI</a:t>
             </a:r>
           </a:p>
         </p:txBody>
@@ -20823,7 +20823,7 @@
           <a:lstStyle/>
           <a:p>
             <a:pPr>
-              <a:defRPr sz="919">
+              <a:defRPr sz="910">
                 <a:solidFill>
                   <a:srgbClr val="F5F5F5"/>
                 </a:solidFill>
@@ -21351,15 +21351,15 @@
               </a:defRPr>
             </a:pPr>
             <a:r>
-              <a:t>KONSEP &amp; CARA KERJA</a:t>
+              <a:t>KONSEP &amp; ALUR KERJA</a:t>
             </a:r>
           </a:p>
           <a:p>
             <a:pPr>
               <a:spcAft>
-                <a:spcPts val="600"/>
+                <a:spcPts val="500"/>
               </a:spcAft>
-              <a:defRPr sz="1100">
+              <a:defRPr sz="1060">
                 <a:solidFill>
                   <a:srgbClr val="141414"/>
                 </a:solidFill>
@@ -21373,9 +21373,9 @@
           <a:p>
             <a:pPr>
               <a:spcAft>
-                <a:spcPts val="600"/>
+                <a:spcPts val="500"/>
               </a:spcAft>
-              <a:defRPr sz="1100">
+              <a:defRPr sz="1060">
                 <a:solidFill>
                   <a:srgbClr val="141414"/>
                 </a:solidFill>
@@ -21389,9 +21389,9 @@
           <a:p>
             <a:pPr>
               <a:spcAft>
-                <a:spcPts val="600"/>
+                <a:spcPts val="500"/>
               </a:spcAft>
-              <a:defRPr sz="1100">
+              <a:defRPr sz="1060">
                 <a:solidFill>
                   <a:srgbClr val="141414"/>
                 </a:solidFill>
@@ -21404,7 +21404,7 @@
           </a:p>
           <a:p>
             <a:pPr>
-              <a:defRPr sz="1050" b="1">
+              <a:defRPr sz="1019" b="1">
                 <a:solidFill>
                   <a:srgbClr val="000000"/>
                 </a:solidFill>
@@ -21412,7 +21412,7 @@
               </a:defRPr>
             </a:pPr>
             <a:r>
-              <a:t>💡 Tips Praktik: Selalu bungkus konten body dengan SafeArea jika Anda tidak menggunakan AppBar bawaan!</a:t>
+              <a:t>💡 Tips Praktis: Selalu bungkus konten body dengan SafeArea jika Anda tidak menggunakan AppBar bawaan!</a:t>
             </a:r>
           </a:p>
         </p:txBody>
@@ -21520,7 +21520,7 @@
             <a:avLst/>
           </a:prstGeom>
           <a:solidFill>
-            <a:srgbClr val="FFE600"/>
+            <a:srgbClr val="38BDF8"/>
           </a:solidFill>
           <a:ln w="31750">
             <a:solidFill>
@@ -21581,7 +21581,7 @@
               </a:defRPr>
             </a:pPr>
             <a:r>
-              <a:t>safe_area_demo.dart  |  CONTOH KODE BERSIH</a:t>
+              <a:t>safe_area_demo.dart  |  KODE IMPLEMENTASI</a:t>
             </a:r>
           </a:p>
         </p:txBody>
@@ -21609,7 +21609,7 @@
           <a:lstStyle/>
           <a:p>
             <a:pPr>
-              <a:defRPr sz="919">
+              <a:defRPr sz="910">
                 <a:solidFill>
                   <a:srgbClr val="F5F5F5"/>
                 </a:solidFill>
